--- a/2301135_template.pptx
+++ b/2301135_template.pptx
@@ -110,6 +110,21 @@
     </a:lvl9pPr>
   </p:defaultTextStyle>
   <p:extLst>
+    <p:ext uri="{521415D9-36F7-43E2-AB2F-B90AF26B5E84}">
+      <p14:sectionLst xmlns:p14="http://schemas.microsoft.com/office/powerpoint/2010/main">
+        <p14:section name="Default Section" id="{CC4529A8-39C1-49AB-8419-298AB0305129}">
+          <p14:sldIdLst>
+            <p14:sldId id="257"/>
+          </p14:sldIdLst>
+        </p14:section>
+        <p14:section name="Untitled Section" id="{FB1AD76F-DC2E-44D3-8BCF-C13CEBEC66FB}">
+          <p14:sldIdLst>
+            <p14:sldId id="260"/>
+            <p14:sldId id="264"/>
+          </p14:sldIdLst>
+        </p14:section>
+      </p14:sectionLst>
+    </p:ext>
     <p:ext uri="{EFAFB233-063F-42B5-8137-9DF3F51BA10A}">
       <p15:sldGuideLst xmlns:p15="http://schemas.microsoft.com/office/powerpoint/2012/main"/>
     </p:ext>
@@ -120,7 +135,7 @@
 <file path=ppt/revisionInfo.xml><?xml version="1.0" encoding="utf-8"?>
 <p1510:revInfo xmlns:a="http://schemas.openxmlformats.org/drawingml/2006/main" xmlns:r="http://schemas.openxmlformats.org/officeDocument/2006/relationships" xmlns:p1510="http://schemas.microsoft.com/office/powerpoint/2015/10/main">
   <p1510:revLst>
-    <p1510:client id="{37DEF75A-0905-4AC8-B761-986CAAF51CB7}" v="39" dt="2026-03-10T18:17:39.983"/>
+    <p1510:client id="{37DEF75A-0905-4AC8-B761-986CAAF51CB7}" v="201" dt="2026-03-11T11:04:16.229"/>
   </p1510:revLst>
 </p1510:revInfo>
 </file>
@@ -207,7 +222,7 @@
           <a:p>
             <a:fld id="{1639F691-A225-450C-BD8C-7FCF826521BF}" type="datetimeFigureOut">
               <a:rPr lang="en-IN" smtClean="0"/>
-              <a:t>10-03-2026</a:t>
+              <a:t>11-03-2026</a:t>
             </a:fld>
             <a:endParaRPr lang="en-IN"/>
           </a:p>
@@ -900,7 +915,7 @@
           <a:p>
             <a:fld id="{4769FD05-0299-461C-8121-9386E0C8B94B}" type="datetimeFigureOut">
               <a:rPr lang="en-IN" smtClean="0"/>
-              <a:t>10-03-2026</a:t>
+              <a:t>11-03-2026</a:t>
             </a:fld>
             <a:endParaRPr lang="en-IN"/>
           </a:p>
@@ -1100,7 +1115,7 @@
           <a:p>
             <a:fld id="{4769FD05-0299-461C-8121-9386E0C8B94B}" type="datetimeFigureOut">
               <a:rPr lang="en-IN" smtClean="0"/>
-              <a:t>10-03-2026</a:t>
+              <a:t>11-03-2026</a:t>
             </a:fld>
             <a:endParaRPr lang="en-IN"/>
           </a:p>
@@ -1310,7 +1325,7 @@
           <a:p>
             <a:fld id="{4769FD05-0299-461C-8121-9386E0C8B94B}" type="datetimeFigureOut">
               <a:rPr lang="en-IN" smtClean="0"/>
-              <a:t>10-03-2026</a:t>
+              <a:t>11-03-2026</a:t>
             </a:fld>
             <a:endParaRPr lang="en-IN"/>
           </a:p>
@@ -1510,7 +1525,7 @@
           <a:p>
             <a:fld id="{4769FD05-0299-461C-8121-9386E0C8B94B}" type="datetimeFigureOut">
               <a:rPr lang="en-IN" smtClean="0"/>
-              <a:t>10-03-2026</a:t>
+              <a:t>11-03-2026</a:t>
             </a:fld>
             <a:endParaRPr lang="en-IN"/>
           </a:p>
@@ -1786,7 +1801,7 @@
           <a:p>
             <a:fld id="{4769FD05-0299-461C-8121-9386E0C8B94B}" type="datetimeFigureOut">
               <a:rPr lang="en-IN" smtClean="0"/>
-              <a:t>10-03-2026</a:t>
+              <a:t>11-03-2026</a:t>
             </a:fld>
             <a:endParaRPr lang="en-IN"/>
           </a:p>
@@ -2054,7 +2069,7 @@
           <a:p>
             <a:fld id="{4769FD05-0299-461C-8121-9386E0C8B94B}" type="datetimeFigureOut">
               <a:rPr lang="en-IN" smtClean="0"/>
-              <a:t>10-03-2026</a:t>
+              <a:t>11-03-2026</a:t>
             </a:fld>
             <a:endParaRPr lang="en-IN"/>
           </a:p>
@@ -2469,7 +2484,7 @@
           <a:p>
             <a:fld id="{4769FD05-0299-461C-8121-9386E0C8B94B}" type="datetimeFigureOut">
               <a:rPr lang="en-IN" smtClean="0"/>
-              <a:t>10-03-2026</a:t>
+              <a:t>11-03-2026</a:t>
             </a:fld>
             <a:endParaRPr lang="en-IN"/>
           </a:p>
@@ -2611,7 +2626,7 @@
           <a:p>
             <a:fld id="{4769FD05-0299-461C-8121-9386E0C8B94B}" type="datetimeFigureOut">
               <a:rPr lang="en-IN" smtClean="0"/>
-              <a:t>10-03-2026</a:t>
+              <a:t>11-03-2026</a:t>
             </a:fld>
             <a:endParaRPr lang="en-IN"/>
           </a:p>
@@ -2724,7 +2739,7 @@
           <a:p>
             <a:fld id="{4769FD05-0299-461C-8121-9386E0C8B94B}" type="datetimeFigureOut">
               <a:rPr lang="en-IN" smtClean="0"/>
-              <a:t>10-03-2026</a:t>
+              <a:t>11-03-2026</a:t>
             </a:fld>
             <a:endParaRPr lang="en-IN"/>
           </a:p>
@@ -3037,7 +3052,7 @@
           <a:p>
             <a:fld id="{4769FD05-0299-461C-8121-9386E0C8B94B}" type="datetimeFigureOut">
               <a:rPr lang="en-IN" smtClean="0"/>
-              <a:t>10-03-2026</a:t>
+              <a:t>11-03-2026</a:t>
             </a:fld>
             <a:endParaRPr lang="en-IN"/>
           </a:p>
@@ -3326,7 +3341,7 @@
           <a:p>
             <a:fld id="{4769FD05-0299-461C-8121-9386E0C8B94B}" type="datetimeFigureOut">
               <a:rPr lang="en-IN" smtClean="0"/>
-              <a:t>10-03-2026</a:t>
+              <a:t>11-03-2026</a:t>
             </a:fld>
             <a:endParaRPr lang="en-IN"/>
           </a:p>
@@ -3569,7 +3584,7 @@
           <a:p>
             <a:fld id="{4769FD05-0299-461C-8121-9386E0C8B94B}" type="datetimeFigureOut">
               <a:rPr lang="en-IN" smtClean="0"/>
-              <a:t>10-03-2026</a:t>
+              <a:t>11-03-2026</a:t>
             </a:fld>
             <a:endParaRPr lang="en-IN"/>
           </a:p>
@@ -3988,10 +4003,10 @@
       </p:grpSpPr>
       <p:sp>
         <p:nvSpPr>
-          <p:cNvPr id="3" name="Content Placeholder 2">
-            <a:extLst>
-              <a:ext uri="{FF2B5EF4-FFF2-40B4-BE49-F238E27FC236}">
-                <a16:creationId xmlns:a16="http://schemas.microsoft.com/office/drawing/2014/main" id="{4BB4E15D-7C0F-103D-C652-7FEDA4F33FA5}"/>
+          <p:cNvPr id="5" name="Title 4">
+            <a:extLst>
+              <a:ext uri="{FF2B5EF4-FFF2-40B4-BE49-F238E27FC236}">
+                <a16:creationId xmlns:a16="http://schemas.microsoft.com/office/drawing/2014/main" id="{29E4B88B-3BD1-915A-005B-C5B7B68137B9}"/>
               </a:ext>
             </a:extLst>
           </p:cNvPr>
@@ -3999,157 +4014,422 @@
             <a:spLocks noGrp="1"/>
           </p:cNvSpPr>
           <p:nvPr>
-            <p:ph idx="1"/>
+            <p:ph type="title"/>
+          </p:nvPr>
+        </p:nvSpPr>
+        <p:spPr>
+          <a:xfrm flipV="1">
+            <a:off x="11875332" y="6858000"/>
+            <a:ext cx="51625" cy="45719"/>
+          </a:xfrm>
+        </p:spPr>
+        <p:txBody>
+          <a:bodyPr>
+            <a:normAutofit fontScale="90000"/>
+          </a:bodyPr>
+          <a:lstStyle/>
+          <a:p>
+            <a:r>
+              <a:rPr lang="en-US" sz="100" dirty="0"/>
+              <a:t>.</a:t>
+            </a:r>
+          </a:p>
+        </p:txBody>
+      </p:sp>
+      <p:sp>
+        <p:nvSpPr>
+          <p:cNvPr id="7" name="Content Placeholder 6">
+            <a:extLst>
+              <a:ext uri="{FF2B5EF4-FFF2-40B4-BE49-F238E27FC236}">
+                <a16:creationId xmlns:a16="http://schemas.microsoft.com/office/drawing/2014/main" id="{92839C98-C147-DE52-E6CD-81F8A0FD50B5}"/>
+              </a:ext>
+            </a:extLst>
+          </p:cNvPr>
+          <p:cNvSpPr>
+            <a:spLocks noGrp="1"/>
+          </p:cNvSpPr>
+          <p:nvPr>
+            <p:ph sz="half" idx="1"/>
           </p:nvPr>
         </p:nvSpPr>
         <p:spPr>
           <a:xfrm>
-            <a:off x="0" y="1124416"/>
-            <a:ext cx="12192000" cy="5362409"/>
+            <a:off x="0" y="1124415"/>
+            <a:ext cx="6172200" cy="5356284"/>
           </a:xfrm>
         </p:spPr>
         <p:txBody>
           <a:bodyPr>
-            <a:normAutofit lnSpcReduction="10000"/>
+            <a:normAutofit/>
           </a:bodyPr>
           <a:lstStyle/>
-          <a:p>
-            <a:r>
-              <a:rPr lang="en-IN" b="1" dirty="0">
-                <a:latin typeface="Calibri (Body)"/>
-              </a:rPr>
-              <a:t>Introduction</a:t>
-            </a:r>
-            <a:r>
-              <a:rPr lang="en-IN" dirty="0">
-                <a:latin typeface="Calibri (Body)"/>
-              </a:rPr>
-              <a:t>:</a:t>
-            </a:r>
-          </a:p>
-          <a:p>
-            <a:pPr lvl="1">
-              <a:buFont typeface="Wingdings" panose="05000000000000000000" pitchFamily="2" charset="2"/>
-              <a:buChar char="§"/>
-            </a:pPr>
-            <a:r>
-              <a:rPr lang="en-US" dirty="0"/>
-              <a:t>Traffic congestion increases travel time, fuel consumption, and air pollution in urban cities.</a:t>
-            </a:r>
-            <a:endParaRPr lang="en-IN" dirty="0">
-              <a:latin typeface="Calibri (Body)"/>
-            </a:endParaRPr>
-          </a:p>
-          <a:p>
-            <a:pPr lvl="1">
-              <a:buFont typeface="Wingdings" panose="05000000000000000000" pitchFamily="2" charset="2"/>
-              <a:buChar char="§"/>
-            </a:pPr>
-            <a:r>
-              <a:rPr lang="en-US" dirty="0"/>
-              <a:t>Recent advances in </a:t>
-            </a:r>
-            <a:r>
-              <a:rPr lang="en-US" b="1" dirty="0"/>
-              <a:t>AI</a:t>
-            </a:r>
-            <a:r>
-              <a:rPr lang="en-US" dirty="0"/>
-              <a:t> and </a:t>
-            </a:r>
-            <a:r>
-              <a:rPr lang="en-US" b="1" dirty="0"/>
-              <a:t>Computer Vision </a:t>
-            </a:r>
-            <a:r>
-              <a:rPr lang="en-US" dirty="0"/>
-              <a:t>allow traffic monitoring using camera systems that can classify vehicles in real time and enables dynamic traffic analysis.</a:t>
-            </a:r>
-            <a:endParaRPr lang="en-IN" dirty="0">
-              <a:latin typeface="Calibri (Body)"/>
-            </a:endParaRPr>
-          </a:p>
-          <a:p>
-            <a:pPr lvl="1">
-              <a:buFont typeface="Wingdings" panose="05000000000000000000" pitchFamily="2" charset="2"/>
-              <a:buChar char="§"/>
-            </a:pPr>
-            <a:r>
-              <a:rPr lang="en-US" dirty="0"/>
-              <a:t>This project proposes an AI based automated traffic management system that uses computer vision to analyze traffic conditions and dynamically control traffic signals while preventing deadlock situations at intersections.</a:t>
-            </a:r>
-            <a:endParaRPr lang="en-IN" dirty="0">
-              <a:latin typeface="Calibri (Body)"/>
-            </a:endParaRPr>
-          </a:p>
-          <a:p>
-            <a:r>
-              <a:rPr lang="en-IN" b="1" dirty="0">
-                <a:latin typeface="Calibri (Body)"/>
-              </a:rPr>
-              <a:t>Motivation</a:t>
-            </a:r>
-            <a:r>
-              <a:rPr lang="en-IN" dirty="0">
-                <a:latin typeface="Calibri (Body)"/>
-              </a:rPr>
-              <a:t>:</a:t>
-            </a:r>
-          </a:p>
-          <a:p>
-            <a:pPr lvl="1">
-              <a:buFont typeface="Wingdings" panose="05000000000000000000" pitchFamily="2" charset="2"/>
-              <a:buChar char="§"/>
-            </a:pPr>
-            <a:r>
-              <a:rPr lang="en-US" dirty="0"/>
-              <a:t>Current traffic systems cannot adapt to dynamic traffic density, often causing long waiting times and inefficient traffic flow.</a:t>
-            </a:r>
-            <a:endParaRPr lang="en-IN" dirty="0">
-              <a:latin typeface="Calibri (Body)"/>
-            </a:endParaRPr>
-          </a:p>
-          <a:p>
-            <a:pPr lvl="1">
-              <a:buFont typeface="Wingdings" panose="05000000000000000000" pitchFamily="2" charset="2"/>
-              <a:buChar char="§"/>
-            </a:pPr>
-            <a:r>
-              <a:rPr lang="en-US" dirty="0"/>
-              <a:t>Intersections frequently suffer from </a:t>
-            </a:r>
-            <a:r>
-              <a:rPr lang="en-US" b="1" dirty="0"/>
-              <a:t>deadlock situations</a:t>
-            </a:r>
-            <a:r>
-              <a:rPr lang="en-US" dirty="0"/>
-              <a:t>, where vehicles block the intersection and stop movement in all directions</a:t>
-            </a:r>
-            <a:endParaRPr lang="en-IN" dirty="0">
-              <a:latin typeface="Calibri (Body)"/>
-            </a:endParaRPr>
-          </a:p>
-          <a:p>
-            <a:pPr lvl="1">
-              <a:buFont typeface="Wingdings" panose="05000000000000000000" pitchFamily="2" charset="2"/>
-              <a:buChar char="§"/>
-            </a:pPr>
-            <a:r>
-              <a:rPr lang="en-US" dirty="0"/>
-              <a:t>An intelligent system capable of detecting vehicles, analyzing traffic density, detecting deadlocks, and coordinating traffic signals can significantly improve traffic flow and reduce congestion.</a:t>
-            </a:r>
-            <a:endParaRPr lang="en-IN" dirty="0">
-              <a:latin typeface="Calibri (Body)"/>
-            </a:endParaRPr>
-          </a:p>
           <a:p>
             <a:pPr marL="0" indent="0">
               <a:buNone/>
             </a:pPr>
-            <a:endParaRPr lang="en-IN" dirty="0">
-              <a:latin typeface="Calibri (Body)"/>
+            <a:r>
+              <a:rPr lang="en-US" dirty="0">
+                <a:latin typeface="Aptos" panose="020B0004020202020204" pitchFamily="34" charset="0"/>
+              </a:rPr>
+              <a:t>Introduction</a:t>
+            </a:r>
+          </a:p>
+          <a:p>
+            <a:pPr marL="0" indent="0">
+              <a:lnSpc>
+                <a:spcPct val="100000"/>
+              </a:lnSpc>
+              <a:buNone/>
+            </a:pPr>
+            <a:r>
+              <a:rPr lang="en-US" sz="2000" dirty="0">
+                <a:latin typeface="Aptos" panose="020B0004020202020204" pitchFamily="34" charset="0"/>
+              </a:rPr>
+              <a:t>• Urban intersections often experience </a:t>
+            </a:r>
+            <a:r>
+              <a:rPr lang="en-US" sz="2000" b="1" dirty="0">
+                <a:latin typeface="Aptos" panose="020B0004020202020204" pitchFamily="34" charset="0"/>
+              </a:rPr>
+              <a:t>congestion due to static traffic signal scheduling</a:t>
+            </a:r>
+            <a:r>
+              <a:rPr lang="en-US" sz="2000" dirty="0">
+                <a:latin typeface="Aptos" panose="020B0004020202020204" pitchFamily="34" charset="0"/>
+              </a:rPr>
+              <a:t>.</a:t>
+            </a:r>
+            <a:br>
+              <a:rPr lang="en-US" sz="2000" dirty="0">
+                <a:latin typeface="Aptos" panose="020B0004020202020204" pitchFamily="34" charset="0"/>
+              </a:rPr>
+            </a:br>
+            <a:r>
+              <a:rPr lang="en-US" sz="2000" dirty="0">
+                <a:latin typeface="Aptos" panose="020B0004020202020204" pitchFamily="34" charset="0"/>
+              </a:rPr>
+              <a:t>• Vehicles entering the intersection without exit space can cause </a:t>
+            </a:r>
+            <a:r>
+              <a:rPr lang="en-US" sz="2000" b="1" dirty="0">
+                <a:latin typeface="Aptos" panose="020B0004020202020204" pitchFamily="34" charset="0"/>
+              </a:rPr>
+              <a:t>gridlock (deadlock)</a:t>
+            </a:r>
+            <a:r>
+              <a:rPr lang="en-US" sz="2000" dirty="0">
+                <a:latin typeface="Aptos" panose="020B0004020202020204" pitchFamily="34" charset="0"/>
+              </a:rPr>
+              <a:t> situations.</a:t>
+            </a:r>
+          </a:p>
+          <a:p>
+            <a:pPr marL="0" indent="0">
+              <a:lnSpc>
+                <a:spcPct val="100000"/>
+              </a:lnSpc>
+              <a:buNone/>
+            </a:pPr>
+            <a:endParaRPr lang="en-US" sz="2000" dirty="0">
+              <a:latin typeface="Aptos" panose="020B0004020202020204" pitchFamily="34" charset="0"/>
             </a:endParaRPr>
+          </a:p>
+          <a:p>
+            <a:pPr marL="0" indent="0">
+              <a:lnSpc>
+                <a:spcPct val="100000"/>
+              </a:lnSpc>
+              <a:buNone/>
+            </a:pPr>
+            <a:endParaRPr lang="en-US" sz="2000" dirty="0">
+              <a:latin typeface="Aptos" panose="020B0004020202020204" pitchFamily="34" charset="0"/>
+            </a:endParaRPr>
+          </a:p>
+          <a:p>
+            <a:pPr marL="0" indent="0">
+              <a:buNone/>
+            </a:pPr>
+            <a:r>
+              <a:rPr lang="en-US" dirty="0">
+                <a:latin typeface="Aptos" panose="020B0004020202020204" pitchFamily="34" charset="0"/>
+              </a:rPr>
+              <a:t>Motivation</a:t>
+            </a:r>
+          </a:p>
+          <a:p>
+            <a:pPr marL="0" indent="0">
+              <a:lnSpc>
+                <a:spcPct val="100000"/>
+              </a:lnSpc>
+              <a:buNone/>
+            </a:pPr>
+            <a:r>
+              <a:rPr lang="en-US" sz="2000" dirty="0">
+                <a:latin typeface="Aptos" panose="020B0004020202020204" pitchFamily="34" charset="0"/>
+              </a:rPr>
+              <a:t>• Real-time traffic analysis using </a:t>
+            </a:r>
+            <a:r>
+              <a:rPr lang="en-US" sz="2000" b="1" dirty="0">
+                <a:latin typeface="Aptos" panose="020B0004020202020204" pitchFamily="34" charset="0"/>
+              </a:rPr>
+              <a:t>computer vision</a:t>
+            </a:r>
+            <a:r>
+              <a:rPr lang="en-US" sz="2000" dirty="0">
+                <a:latin typeface="Aptos" panose="020B0004020202020204" pitchFamily="34" charset="0"/>
+              </a:rPr>
+              <a:t> can estimate lane density and intersection occupancy.</a:t>
+            </a:r>
+            <a:br>
+              <a:rPr lang="en-US" sz="2000" dirty="0">
+                <a:latin typeface="Aptos" panose="020B0004020202020204" pitchFamily="34" charset="0"/>
+              </a:rPr>
+            </a:br>
+            <a:r>
+              <a:rPr lang="en-US" sz="2000" dirty="0">
+                <a:latin typeface="Aptos" panose="020B0004020202020204" pitchFamily="34" charset="0"/>
+              </a:rPr>
+              <a:t>• An </a:t>
+            </a:r>
+            <a:r>
+              <a:rPr lang="en-US" sz="2000" b="1" dirty="0">
+                <a:latin typeface="Aptos" panose="020B0004020202020204" pitchFamily="34" charset="0"/>
+              </a:rPr>
+              <a:t>AI based adaptive signal system</a:t>
+            </a:r>
+            <a:r>
+              <a:rPr lang="en-US" sz="2000" dirty="0">
+                <a:latin typeface="Aptos" panose="020B0004020202020204" pitchFamily="34" charset="0"/>
+              </a:rPr>
+              <a:t> can dynamically manage traffic flow and prevent deadlocks.</a:t>
+            </a:r>
+          </a:p>
+          <a:p>
+            <a:pPr marL="0" indent="0">
+              <a:lnSpc>
+                <a:spcPct val="100000"/>
+              </a:lnSpc>
+              <a:buNone/>
+            </a:pPr>
+            <a:endParaRPr lang="en-US" sz="2000" dirty="0">
+              <a:latin typeface="Aptos" panose="020B0004020202020204" pitchFamily="34" charset="0"/>
+            </a:endParaRPr>
+          </a:p>
+          <a:p>
+            <a:pPr marL="0" indent="0">
+              <a:buNone/>
+            </a:pPr>
+            <a:endParaRPr lang="en-US" sz="2000" dirty="0">
+              <a:latin typeface="Aptos" panose="020B0004020202020204" pitchFamily="34" charset="0"/>
+            </a:endParaRPr>
+          </a:p>
+          <a:p>
+            <a:pPr marL="0" indent="0">
+              <a:buNone/>
+            </a:pPr>
+            <a:endParaRPr lang="en-US" sz="2000" dirty="0">
+              <a:latin typeface="Aptos" panose="020B0004020202020204" pitchFamily="34" charset="0"/>
+            </a:endParaRPr>
+          </a:p>
+          <a:p>
+            <a:endParaRPr lang="en-US" dirty="0"/>
+          </a:p>
+        </p:txBody>
+      </p:sp>
+      <p:sp>
+        <p:nvSpPr>
+          <p:cNvPr id="8" name="Content Placeholder 7">
+            <a:extLst>
+              <a:ext uri="{FF2B5EF4-FFF2-40B4-BE49-F238E27FC236}">
+                <a16:creationId xmlns:a16="http://schemas.microsoft.com/office/drawing/2014/main" id="{54A4859E-B363-ACA4-47C1-382EB8B68AFF}"/>
+              </a:ext>
+            </a:extLst>
+          </p:cNvPr>
+          <p:cNvSpPr>
+            <a:spLocks noGrp="1"/>
+          </p:cNvSpPr>
+          <p:nvPr>
+            <p:ph sz="half" idx="2"/>
+          </p:nvPr>
+        </p:nvSpPr>
+        <p:spPr>
+          <a:xfrm>
+            <a:off x="6172200" y="1124416"/>
+            <a:ext cx="6019800" cy="5367169"/>
+          </a:xfrm>
+        </p:spPr>
+        <p:txBody>
+          <a:bodyPr>
+            <a:normAutofit/>
+          </a:bodyPr>
+          <a:lstStyle/>
+          <a:p>
+            <a:pPr marL="0" indent="0">
+              <a:buNone/>
+            </a:pPr>
+            <a:r>
+              <a:rPr lang="en-US" dirty="0">
+                <a:latin typeface="Aptos" panose="020B0004020202020204" pitchFamily="34" charset="0"/>
+              </a:rPr>
+              <a:t>Existing Work</a:t>
+            </a:r>
+          </a:p>
+          <a:p>
+            <a:pPr marL="0" indent="0">
+              <a:buNone/>
+            </a:pPr>
+            <a:r>
+              <a:rPr lang="en-US" sz="2000" dirty="0">
+                <a:latin typeface="Aptos" panose="020B0004020202020204" pitchFamily="34" charset="0"/>
+              </a:rPr>
+              <a:t>• </a:t>
+            </a:r>
+            <a:r>
+              <a:rPr lang="en-US" sz="2000" b="1" dirty="0">
+                <a:latin typeface="Aptos" panose="020B0004020202020204" pitchFamily="34" charset="0"/>
+              </a:rPr>
+              <a:t>Fixed-time traffic signals</a:t>
+            </a:r>
+            <a:r>
+              <a:rPr lang="en-US" sz="2000" dirty="0">
+                <a:latin typeface="Aptos" panose="020B0004020202020204" pitchFamily="34" charset="0"/>
+              </a:rPr>
+              <a:t> widely used in urban intersections.</a:t>
+            </a:r>
+            <a:br>
+              <a:rPr lang="en-US" sz="2000" dirty="0">
+                <a:latin typeface="Aptos" panose="020B0004020202020204" pitchFamily="34" charset="0"/>
+              </a:rPr>
+            </a:br>
+            <a:r>
+              <a:rPr lang="en-US" sz="2000" dirty="0">
+                <a:latin typeface="Aptos" panose="020B0004020202020204" pitchFamily="34" charset="0"/>
+              </a:rPr>
+              <a:t>• </a:t>
+            </a:r>
+            <a:r>
+              <a:rPr lang="en-US" sz="2000" b="1" dirty="0">
+                <a:latin typeface="Aptos" panose="020B0004020202020204" pitchFamily="34" charset="0"/>
+              </a:rPr>
+              <a:t>Manual traffic control by traffic police</a:t>
+            </a:r>
+            <a:r>
+              <a:rPr lang="en-US" sz="2000" dirty="0">
+                <a:latin typeface="Aptos" panose="020B0004020202020204" pitchFamily="34" charset="0"/>
+              </a:rPr>
+              <a:t> during peak congestion.</a:t>
+            </a:r>
+            <a:br>
+              <a:rPr lang="en-US" sz="2000" dirty="0">
+                <a:latin typeface="Aptos" panose="020B0004020202020204" pitchFamily="34" charset="0"/>
+              </a:rPr>
+            </a:br>
+            <a:r>
+              <a:rPr lang="en-US" sz="2000" dirty="0">
+                <a:latin typeface="Aptos" panose="020B0004020202020204" pitchFamily="34" charset="0"/>
+              </a:rPr>
+              <a:t>• </a:t>
+            </a:r>
+            <a:r>
+              <a:rPr lang="en-US" sz="2000" b="1" dirty="0">
+                <a:latin typeface="Aptos" panose="020B0004020202020204" pitchFamily="34" charset="0"/>
+              </a:rPr>
+              <a:t>Engineer-configured signal timers</a:t>
+            </a:r>
+            <a:r>
+              <a:rPr lang="en-US" sz="2000" dirty="0">
+                <a:latin typeface="Aptos" panose="020B0004020202020204" pitchFamily="34" charset="0"/>
+              </a:rPr>
+              <a:t> based on historical traffic data</a:t>
+            </a:r>
+            <a:r>
+              <a:rPr lang="en-US" sz="2000" dirty="0"/>
+              <a:t>.</a:t>
+            </a:r>
+          </a:p>
+          <a:p>
+            <a:endParaRPr lang="en-US" dirty="0"/>
+          </a:p>
+          <a:p>
+            <a:r>
+              <a:rPr lang="en-US" sz="3000" dirty="0">
+                <a:latin typeface="Aptos" panose="020B0004020202020204" pitchFamily="34" charset="0"/>
+              </a:rPr>
+              <a:t>Gaps</a:t>
+            </a:r>
+          </a:p>
+          <a:p>
+            <a:pPr marL="0" indent="0">
+              <a:buNone/>
+            </a:pPr>
+            <a:r>
+              <a:rPr lang="en-US" sz="2000" dirty="0">
+                <a:latin typeface="Aptos" panose="020B0004020202020204" pitchFamily="34" charset="0"/>
+              </a:rPr>
+              <a:t>• Fixed timers cannot adapt to </a:t>
+            </a:r>
+            <a:r>
+              <a:rPr lang="en-US" sz="2000" b="1" dirty="0">
+                <a:latin typeface="Aptos" panose="020B0004020202020204" pitchFamily="34" charset="0"/>
+              </a:rPr>
+              <a:t>real-time traffic density variations</a:t>
+            </a:r>
+            <a:r>
+              <a:rPr lang="en-US" sz="2000" dirty="0">
+                <a:latin typeface="Aptos" panose="020B0004020202020204" pitchFamily="34" charset="0"/>
+              </a:rPr>
+              <a:t>.</a:t>
+            </a:r>
+            <a:br>
+              <a:rPr lang="en-US" sz="2000" dirty="0">
+                <a:latin typeface="Aptos" panose="020B0004020202020204" pitchFamily="34" charset="0"/>
+              </a:rPr>
+            </a:br>
+            <a:r>
+              <a:rPr lang="en-US" sz="2000" dirty="0">
+                <a:latin typeface="Aptos" panose="020B0004020202020204" pitchFamily="34" charset="0"/>
+              </a:rPr>
+              <a:t>• Manual control is </a:t>
+            </a:r>
+            <a:r>
+              <a:rPr lang="en-US" sz="2000" b="1" dirty="0">
+                <a:latin typeface="Aptos" panose="020B0004020202020204" pitchFamily="34" charset="0"/>
+              </a:rPr>
+              <a:t>resource intensive and expensive</a:t>
+            </a:r>
+            <a:r>
+              <a:rPr lang="en-US" sz="2000" dirty="0">
+                <a:latin typeface="Aptos" panose="020B0004020202020204" pitchFamily="34" charset="0"/>
+              </a:rPr>
+              <a:t>.</a:t>
+            </a:r>
+            <a:br>
+              <a:rPr lang="en-US" sz="2000" dirty="0">
+                <a:latin typeface="Aptos" panose="020B0004020202020204" pitchFamily="34" charset="0"/>
+              </a:rPr>
+            </a:br>
+            <a:r>
+              <a:rPr lang="en-US" sz="2000" dirty="0">
+                <a:latin typeface="Aptos" panose="020B0004020202020204" pitchFamily="34" charset="0"/>
+              </a:rPr>
+              <a:t>• Current systems rarely handle </a:t>
+            </a:r>
+            <a:r>
+              <a:rPr lang="en-US" sz="2000" b="1" dirty="0">
+                <a:latin typeface="Aptos" panose="020B0004020202020204" pitchFamily="34" charset="0"/>
+              </a:rPr>
+              <a:t>intersection deadlocks or signal coordination</a:t>
+            </a:r>
+            <a:r>
+              <a:rPr lang="en-US" sz="2000" dirty="0">
+                <a:latin typeface="Aptos" panose="020B0004020202020204" pitchFamily="34" charset="0"/>
+              </a:rPr>
+              <a:t>.</a:t>
+            </a:r>
+          </a:p>
+          <a:p>
+            <a:endParaRPr lang="en-US" dirty="0"/>
           </a:p>
         </p:txBody>
       </p:sp>
@@ -4379,7 +4659,7 @@
             <a:avLst/>
           </a:prstGeom>
           <a:solidFill>
-            <a:schemeClr val="accent5">
+            <a:schemeClr val="accent1">
               <a:lumMod val="75000"/>
             </a:schemeClr>
           </a:solidFill>
@@ -4417,7 +4697,7 @@
               <a:t>Project title: </a:t>
             </a:r>
             <a:r>
-              <a:rPr lang="en-US" sz="4100" b="1" dirty="0">
+              <a:rPr lang="en-US" sz="3700" dirty="0">
                 <a:solidFill>
                   <a:schemeClr val="bg1">
                     <a:lumMod val="95000"/>
@@ -4427,7 +4707,7 @@
               <a:t>Automated Traffic Management System </a:t>
             </a:r>
             <a:r>
-              <a:rPr lang="en-US" sz="4900" b="1" dirty="0">
+              <a:rPr lang="en-US" sz="4500" dirty="0">
                 <a:solidFill>
                   <a:schemeClr val="bg1">
                     <a:lumMod val="95000"/>
@@ -4437,7 +4717,7 @@
               <a:t> </a:t>
             </a:r>
             <a:r>
-              <a:rPr lang="en-IN" sz="4900" b="1" dirty="0">
+              <a:rPr lang="en-IN" sz="4500" dirty="0">
                 <a:solidFill>
                   <a:schemeClr val="bg1">
                     <a:lumMod val="95000"/>
@@ -4446,7 +4726,7 @@
               </a:rPr>
               <a:t> </a:t>
             </a:r>
-            <a:endParaRPr lang="en-IN" b="1" dirty="0">
+            <a:endParaRPr lang="en-IN" dirty="0">
               <a:solidFill>
                 <a:schemeClr val="bg1">
                   <a:lumMod val="95000"/>
@@ -4487,6 +4767,42 @@
           <a:xfrm>
             <a:off x="11064145" y="-8877"/>
             <a:ext cx="1127848" cy="1128532"/>
+          </a:xfrm>
+          <a:prstGeom prst="rect">
+            <a:avLst/>
+          </a:prstGeom>
+        </p:spPr>
+      </p:pic>
+      <p:pic>
+        <p:nvPicPr>
+          <p:cNvPr id="10" name="Picture 9">
+            <a:extLst>
+              <a:ext uri="{FF2B5EF4-FFF2-40B4-BE49-F238E27FC236}">
+                <a16:creationId xmlns:a16="http://schemas.microsoft.com/office/drawing/2014/main" id="{33EB7D6F-C3C1-3403-C55E-A430ECDA45D3}"/>
+              </a:ext>
+            </a:extLst>
+          </p:cNvPr>
+          <p:cNvPicPr>
+            <a:picLocks noChangeAspect="1"/>
+          </p:cNvPicPr>
+          <p:nvPr/>
+        </p:nvPicPr>
+        <p:blipFill>
+          <a:blip r:embed="rId4">
+            <a:extLst>
+              <a:ext uri="{28A0092B-C50C-407E-A947-70E740481C1C}">
+                <a14:useLocalDpi xmlns:a14="http://schemas.microsoft.com/office/drawing/2010/main" val="0"/>
+              </a:ext>
+            </a:extLst>
+          </a:blip>
+          <a:stretch>
+            <a:fillRect/>
+          </a:stretch>
+        </p:blipFill>
+        <p:spPr>
+          <a:xfrm>
+            <a:off x="10267122" y="71273"/>
+            <a:ext cx="685800" cy="966866"/>
           </a:xfrm>
           <a:prstGeom prst="rect">
             <a:avLst/>
@@ -4537,8 +4853,8 @@
         </p:nvGrpSpPr>
         <p:grpSpPr>
           <a:xfrm>
-            <a:off x="0" y="-8877"/>
-            <a:ext cx="12192000" cy="1128532"/>
+            <a:off x="-7" y="-10896"/>
+            <a:ext cx="12192000" cy="973519"/>
             <a:chOff x="0" y="1"/>
             <a:chExt cx="12192000" cy="1128532"/>
           </a:xfrm>
@@ -4566,9 +4882,8 @@
               <a:avLst/>
             </a:prstGeom>
             <a:solidFill>
-              <a:schemeClr val="accent5">
-                <a:lumMod val="60000"/>
-                <a:lumOff val="40000"/>
+              <a:schemeClr val="accent1">
+                <a:lumMod val="75000"/>
               </a:schemeClr>
             </a:solidFill>
           </p:spPr>
@@ -4597,8 +4912,13 @@
             </a:lstStyle>
             <a:p>
               <a:r>
-                <a:rPr lang="en-IN" dirty="0"/>
-                <a:t>Existing work / Literature review:</a:t>
+                <a:rPr lang="en-IN" dirty="0">
+                  <a:solidFill>
+                    <a:schemeClr val="bg1"/>
+                  </a:solidFill>
+                  <a:latin typeface="Aptos" panose="020B0004020202020204" pitchFamily="34" charset="0"/>
+                </a:rPr>
+                <a:t>Details of proposed work/solutions:</a:t>
               </a:r>
             </a:p>
           </p:txBody>
@@ -4643,10 +4963,10 @@
       </p:grpSp>
       <p:sp>
         <p:nvSpPr>
-          <p:cNvPr id="12" name="Content Placeholder 2">
-            <a:extLst>
-              <a:ext uri="{FF2B5EF4-FFF2-40B4-BE49-F238E27FC236}">
-                <a16:creationId xmlns:a16="http://schemas.microsoft.com/office/drawing/2014/main" id="{9014AF74-1ABF-BACD-0C3F-154679BAFB50}"/>
+          <p:cNvPr id="11" name="Title 10">
+            <a:extLst>
+              <a:ext uri="{FF2B5EF4-FFF2-40B4-BE49-F238E27FC236}">
+                <a16:creationId xmlns:a16="http://schemas.microsoft.com/office/drawing/2014/main" id="{2E23C8D1-D9CA-D2C2-4735-8A8E286E9969}"/>
               </a:ext>
             </a:extLst>
           </p:cNvPr>
@@ -4654,132 +4974,944 @@
             <a:spLocks noGrp="1"/>
           </p:cNvSpPr>
           <p:nvPr>
-            <p:ph idx="1"/>
+            <p:ph type="title"/>
           </p:nvPr>
         </p:nvSpPr>
         <p:spPr>
           <a:xfrm>
-            <a:off x="0" y="1124416"/>
-            <a:ext cx="12192000" cy="5350157"/>
+            <a:off x="12022016" y="291402"/>
+            <a:ext cx="45719" cy="62855"/>
           </a:xfrm>
         </p:spPr>
         <p:txBody>
           <a:bodyPr>
-            <a:normAutofit/>
+            <a:normAutofit fontScale="90000"/>
           </a:bodyPr>
           <a:lstStyle/>
           <a:p>
-            <a:pPr fontAlgn="base">
-              <a:buFont typeface="Wingdings" panose="05000000000000000000" pitchFamily="2" charset="2"/>
-              <a:buChar char="§"/>
-            </a:pPr>
-            <a:r>
-              <a:rPr lang="en-US" sz="2400" b="1" dirty="0"/>
-              <a:t>Fixed-Time Traffic Signals : </a:t>
-            </a:r>
-            <a:r>
-              <a:rPr lang="en-US" sz="2400" dirty="0"/>
-              <a:t>Current traffic signal systems operate using </a:t>
-            </a:r>
-            <a:r>
-              <a:rPr lang="en-US" sz="2400" b="1" dirty="0"/>
-              <a:t>fixed-time scheduling</a:t>
-            </a:r>
-            <a:r>
-              <a:rPr lang="en-US" sz="2400" dirty="0"/>
-              <a:t>, where the signal timing is predefined.</a:t>
-            </a:r>
-          </a:p>
-          <a:p>
-            <a:pPr fontAlgn="base">
-              <a:buFont typeface="Wingdings" panose="05000000000000000000" pitchFamily="2" charset="2"/>
-              <a:buChar char="§"/>
-            </a:pPr>
-            <a:r>
-              <a:rPr lang="en-US" sz="2400" b="1" dirty="0"/>
-              <a:t>Traffic Police Control : </a:t>
-            </a:r>
-            <a:r>
-              <a:rPr lang="en-US" sz="2400" dirty="0"/>
-              <a:t>Traffic police manually control traffic during congestion.</a:t>
-            </a:r>
-          </a:p>
-          <a:p>
-            <a:pPr>
-              <a:buFont typeface="Wingdings" panose="05000000000000000000" pitchFamily="2" charset="2"/>
-              <a:buChar char="§"/>
-            </a:pPr>
-            <a:r>
-              <a:rPr lang="en-US" sz="2400" dirty="0"/>
-              <a:t>Existing solutions rarely address </a:t>
-            </a:r>
-            <a:r>
-              <a:rPr lang="en-US" sz="2400" b="1" dirty="0"/>
-              <a:t>intersection deadlocks and multi-intersection synchronization</a:t>
-            </a:r>
-            <a:r>
-              <a:rPr lang="en-US" sz="2400" dirty="0"/>
-              <a:t>, which are major causes of traffic congestion in dense urban environments.</a:t>
-            </a:r>
-          </a:p>
-          <a:p>
-            <a:pPr marL="0" indent="0">
-              <a:buNone/>
-            </a:pPr>
-            <a:endParaRPr lang="en-IN" sz="2400" dirty="0">
-              <a:latin typeface="Calibri (Body)"/>
-            </a:endParaRPr>
-          </a:p>
-          <a:p>
-            <a:r>
-              <a:rPr lang="en-IN" b="1" dirty="0"/>
-              <a:t>Gaps in the existing solutions/work</a:t>
-            </a:r>
-            <a:r>
-              <a:rPr lang="en-IN" dirty="0"/>
-              <a:t>:</a:t>
-            </a:r>
-          </a:p>
-          <a:p>
-            <a:pPr>
-              <a:buFont typeface="Wingdings" panose="05000000000000000000" pitchFamily="2" charset="2"/>
-              <a:buChar char="§"/>
-            </a:pPr>
-            <a:r>
-              <a:rPr lang="en-US" sz="2400" dirty="0"/>
-              <a:t>Fixed signal timing cannot adapt to real-time traffic density variations.</a:t>
-            </a:r>
-          </a:p>
-          <a:p>
-            <a:pPr>
-              <a:buFont typeface="Wingdings" panose="05000000000000000000" pitchFamily="2" charset="2"/>
-              <a:buChar char="§"/>
-            </a:pPr>
-            <a:r>
-              <a:rPr lang="en-US" sz="2400" dirty="0"/>
-              <a:t>Manual traffic control cannot continuously monitor multiple intersections and also labor intensive and expensive.</a:t>
-            </a:r>
-          </a:p>
-          <a:p>
-            <a:pPr>
-              <a:buFont typeface="Wingdings" panose="05000000000000000000" pitchFamily="2" charset="2"/>
-              <a:buChar char="§"/>
-            </a:pPr>
-            <a:r>
-              <a:rPr lang="en-US" sz="2400" dirty="0"/>
-              <a:t>Existing systems rarely detect intersection deadlocks or coordinate signals across intersections, which are major causes of traffic congestion in dense urban environments.</a:t>
-            </a:r>
-          </a:p>
-          <a:p>
-            <a:pPr marL="0" indent="0">
-              <a:buNone/>
-            </a:pPr>
-            <a:endParaRPr lang="en-IN" dirty="0">
-              <a:latin typeface="Calibri (Body)"/>
-            </a:endParaRPr>
-          </a:p>
-        </p:txBody>
-      </p:sp>
+            <a:r>
+              <a:rPr lang="en-US" sz="100" dirty="0"/>
+              <a:t>.</a:t>
+            </a:r>
+          </a:p>
+        </p:txBody>
+      </p:sp>
+      <mc:AlternateContent xmlns:mc="http://schemas.openxmlformats.org/markup-compatibility/2006">
+        <mc:Choice xmlns:a14="http://schemas.microsoft.com/office/drawing/2010/main" Requires="a14">
+          <p:sp>
+            <p:nvSpPr>
+              <p:cNvPr id="13" name="Content Placeholder 12">
+                <a:extLst>
+                  <a:ext uri="{FF2B5EF4-FFF2-40B4-BE49-F238E27FC236}">
+                    <a16:creationId xmlns:a16="http://schemas.microsoft.com/office/drawing/2014/main" id="{CF2EB8D9-E378-E25E-C360-0F28B521C43B}"/>
+                  </a:ext>
+                </a:extLst>
+              </p:cNvPr>
+              <p:cNvSpPr>
+                <a:spLocks noGrp="1"/>
+              </p:cNvSpPr>
+              <p:nvPr>
+                <p:ph sz="half" idx="1"/>
+              </p:nvPr>
+            </p:nvSpPr>
+            <p:spPr>
+              <a:xfrm>
+                <a:off x="1" y="959357"/>
+                <a:ext cx="3768131" cy="5509091"/>
+              </a:xfrm>
+            </p:spPr>
+            <p:txBody>
+              <a:bodyPr>
+                <a:normAutofit/>
+              </a:bodyPr>
+              <a:lstStyle/>
+              <a:p>
+                <a:pPr marL="0" indent="0">
+                  <a:buNone/>
+                </a:pPr>
+                <a:r>
+                  <a:rPr lang="en-US" sz="1600" b="1" dirty="0"/>
+                  <a:t>1️⃣ Traffic Density Estimation</a:t>
+                </a:r>
+                <a:endParaRPr lang="en-US" sz="1600" dirty="0"/>
+              </a:p>
+              <a:p>
+                <a:pPr marL="0" indent="0">
+                  <a:spcBef>
+                    <a:spcPts val="600"/>
+                  </a:spcBef>
+                  <a:buNone/>
+                </a:pPr>
+                <a14:m>
+                  <m:oMath xmlns:m="http://schemas.openxmlformats.org/officeDocument/2006/math">
+                    <m:sSub>
+                      <m:sSubPr>
+                        <m:ctrlPr>
+                          <a:rPr lang="ar-AE" sz="1600" smtClean="0"/>
+                        </m:ctrlPr>
+                      </m:sSubPr>
+                      <m:e>
+                        <m:r>
+                          <a:rPr lang="ar-AE" sz="1600" i="1"/>
+                          <m:t>𝑁</m:t>
+                        </m:r>
+                      </m:e>
+                      <m:sub>
+                        <m:r>
+                          <a:rPr lang="ar-AE" sz="1600" i="1"/>
+                          <m:t>𝑖</m:t>
+                        </m:r>
+                      </m:sub>
+                    </m:sSub>
+                  </m:oMath>
+                </a14:m>
+                <a:r>
+                  <a:rPr lang="ar-AE" sz="1600" dirty="0"/>
+                  <a:t>= </a:t>
+                </a:r>
+                <a:r>
+                  <a:rPr lang="en-US" sz="1600" dirty="0"/>
+                  <a:t>number of vehicles in lane </a:t>
+                </a:r>
+                <a14:m>
+                  <m:oMath xmlns:m="http://schemas.openxmlformats.org/officeDocument/2006/math">
+                    <m:r>
+                      <a:rPr lang="en-US" sz="1600" i="1"/>
+                      <m:t>𝑖</m:t>
+                    </m:r>
+                  </m:oMath>
+                </a14:m>
+                <a:endParaRPr lang="en-US" sz="1600" dirty="0"/>
+              </a:p>
+              <a:p>
+                <a:pPr marL="0" indent="0">
+                  <a:spcBef>
+                    <a:spcPts val="600"/>
+                  </a:spcBef>
+                  <a:buNone/>
+                </a:pPr>
+                <a14:m>
+                  <m:oMath xmlns:m="http://schemas.openxmlformats.org/officeDocument/2006/math">
+                    <m:sSub>
+                      <m:sSubPr>
+                        <m:ctrlPr>
+                          <a:rPr lang="ar-AE" sz="1600"/>
+                        </m:ctrlPr>
+                      </m:sSubPr>
+                      <m:e>
+                        <m:r>
+                          <a:rPr lang="ar-AE" sz="1600" i="1"/>
+                          <m:t>𝐿</m:t>
+                        </m:r>
+                      </m:e>
+                      <m:sub>
+                        <m:r>
+                          <a:rPr lang="ar-AE" sz="1600" i="1"/>
+                          <m:t>𝑖</m:t>
+                        </m:r>
+                      </m:sub>
+                    </m:sSub>
+                  </m:oMath>
+                </a14:m>
+                <a:r>
+                  <a:rPr lang="ar-AE" sz="1600" dirty="0"/>
+                  <a:t>= </a:t>
+                </a:r>
+                <a:r>
+                  <a:rPr lang="en-US" sz="1600" dirty="0"/>
+                  <a:t>length of lane </a:t>
+                </a:r>
+                <a14:m>
+                  <m:oMath xmlns:m="http://schemas.openxmlformats.org/officeDocument/2006/math">
+                    <m:r>
+                      <a:rPr lang="en-US" sz="1600" i="1"/>
+                      <m:t>𝑖</m:t>
+                    </m:r>
+                  </m:oMath>
+                </a14:m>
+                <a:endParaRPr lang="en-US" sz="1600" i="1" dirty="0"/>
+              </a:p>
+              <a:p>
+                <a:pPr marL="0" indent="0">
+                  <a:spcBef>
+                    <a:spcPts val="600"/>
+                  </a:spcBef>
+                  <a:buNone/>
+                </a:pPr>
+                <a14:m>
+                  <m:oMath xmlns:m="http://schemas.openxmlformats.org/officeDocument/2006/math">
+                    <m:sSub>
+                      <m:sSubPr>
+                        <m:ctrlPr>
+                          <a:rPr lang="ar-AE" sz="1600" i="1">
+                            <a:latin typeface="Cambria Math" panose="02040503050406030204" pitchFamily="18" charset="0"/>
+                          </a:rPr>
+                        </m:ctrlPr>
+                      </m:sSubPr>
+                      <m:e>
+                        <m:r>
+                          <a:rPr lang="ar-AE" sz="1600" i="1">
+                            <a:latin typeface="Cambria Math" panose="02040503050406030204" pitchFamily="18" charset="0"/>
+                          </a:rPr>
+                          <m:t>𝐷</m:t>
+                        </m:r>
+                      </m:e>
+                      <m:sub>
+                        <m:r>
+                          <a:rPr lang="ar-AE" sz="1600" i="1">
+                            <a:latin typeface="Cambria Math" panose="02040503050406030204" pitchFamily="18" charset="0"/>
+                          </a:rPr>
+                          <m:t>𝑖</m:t>
+                        </m:r>
+                      </m:sub>
+                    </m:sSub>
+                  </m:oMath>
+                </a14:m>
+                <a:r>
+                  <a:rPr lang="ar-AE" sz="1600" dirty="0"/>
+                  <a:t>= </a:t>
+                </a:r>
+                <a:r>
+                  <a:rPr lang="en-US" sz="1600" dirty="0"/>
+                  <a:t>density of lane </a:t>
+                </a:r>
+                <a14:m>
+                  <m:oMath xmlns:m="http://schemas.openxmlformats.org/officeDocument/2006/math">
+                    <m:r>
+                      <a:rPr lang="en-US" sz="1600" i="1">
+                        <a:latin typeface="Cambria Math" panose="02040503050406030204" pitchFamily="18" charset="0"/>
+                      </a:rPr>
+                      <m:t>𝑖</m:t>
+                    </m:r>
+                  </m:oMath>
+                </a14:m>
+                <a:endParaRPr lang="en-US" sz="1600" dirty="0"/>
+              </a:p>
+              <a:p>
+                <a:pPr marL="0" indent="0">
+                  <a:buNone/>
+                </a:pPr>
+                <a:endParaRPr lang="en-US" sz="1600" dirty="0"/>
+              </a:p>
+              <a:p>
+                <a:pPr marL="0" indent="0">
+                  <a:buNone/>
+                </a:pPr>
+                <a:r>
+                  <a:rPr lang="en-US" sz="1600" dirty="0"/>
+                  <a:t>Higher density → higher congestion</a:t>
+                </a:r>
+              </a:p>
+              <a:p>
+                <a:pPr marL="0" indent="0">
+                  <a:buNone/>
+                </a:pPr>
+                <a:endParaRPr lang="en-US" sz="1600" dirty="0"/>
+              </a:p>
+              <a:p>
+                <a:pPr marL="0" indent="0">
+                  <a:buNone/>
+                </a:pPr>
+                <a:r>
+                  <a:rPr lang="en-US" sz="1600" b="1" dirty="0"/>
+                  <a:t>2️⃣ Lane Priority Score</a:t>
+                </a:r>
+              </a:p>
+              <a:p>
+                <a:pPr>
+                  <a:spcBef>
+                    <a:spcPts val="300"/>
+                  </a:spcBef>
+                </a:pPr>
+                <a:r>
+                  <a:rPr lang="en-US" sz="1600" dirty="0"/>
+                  <a:t>Each lane receives a priority score based</a:t>
+                </a:r>
+              </a:p>
+              <a:p>
+                <a:pPr marL="0" indent="0">
+                  <a:spcBef>
+                    <a:spcPts val="300"/>
+                  </a:spcBef>
+                  <a:buNone/>
+                </a:pPr>
+                <a:r>
+                  <a:rPr lang="en-US" sz="1600" dirty="0"/>
+                  <a:t> on </a:t>
+                </a:r>
+                <a:r>
+                  <a:rPr lang="en-US" sz="1600" b="1" dirty="0"/>
+                  <a:t>density, queue length, and emergency vehicles</a:t>
+                </a:r>
+                <a:r>
+                  <a:rPr lang="en-US" sz="1600" dirty="0"/>
+                  <a:t>.</a:t>
+                </a:r>
+              </a:p>
+              <a:p>
+                <a:pPr marL="0" indent="0">
+                  <a:spcBef>
+                    <a:spcPts val="600"/>
+                  </a:spcBef>
+                  <a:buNone/>
+                </a:pPr>
+                <a14:m>
+                  <m:oMath xmlns:m="http://schemas.openxmlformats.org/officeDocument/2006/math">
+                    <m:sSub>
+                      <m:sSubPr>
+                        <m:ctrlPr>
+                          <a:rPr lang="ar-AE" sz="1600" i="1" smtClean="0">
+                            <a:latin typeface="Cambria Math" panose="02040503050406030204" pitchFamily="18" charset="0"/>
+                          </a:rPr>
+                        </m:ctrlPr>
+                      </m:sSubPr>
+                      <m:e>
+                        <m:r>
+                          <a:rPr lang="ar-AE" sz="1600" i="1" smtClean="0">
+                            <a:latin typeface="Cambria Math" panose="02040503050406030204" pitchFamily="18" charset="0"/>
+                          </a:rPr>
+                          <m:t>𝑃</m:t>
+                        </m:r>
+                      </m:e>
+                      <m:sub>
+                        <m:r>
+                          <a:rPr lang="ar-AE" sz="1600" i="1">
+                            <a:latin typeface="Cambria Math" panose="02040503050406030204" pitchFamily="18" charset="0"/>
+                          </a:rPr>
+                          <m:t>𝑖</m:t>
+                        </m:r>
+                      </m:sub>
+                    </m:sSub>
+                  </m:oMath>
+                </a14:m>
+                <a:r>
+                  <a:rPr lang="ar-AE" sz="1600" dirty="0"/>
+                  <a:t>= </a:t>
+                </a:r>
+                <a:r>
+                  <a:rPr lang="en-US" sz="1600" dirty="0"/>
+                  <a:t>priority score of lane I</a:t>
+                </a:r>
+              </a:p>
+              <a:p>
+                <a:pPr marL="0" indent="0">
+                  <a:spcBef>
+                    <a:spcPts val="600"/>
+                  </a:spcBef>
+                  <a:buNone/>
+                </a:pPr>
+                <a14:m>
+                  <m:oMath xmlns:m="http://schemas.openxmlformats.org/officeDocument/2006/math">
+                    <m:sSub>
+                      <m:sSubPr>
+                        <m:ctrlPr>
+                          <a:rPr lang="ar-AE" sz="1600" i="1">
+                            <a:latin typeface="Cambria Math" panose="02040503050406030204" pitchFamily="18" charset="0"/>
+                          </a:rPr>
+                        </m:ctrlPr>
+                      </m:sSubPr>
+                      <m:e>
+                        <m:r>
+                          <a:rPr lang="ar-AE" sz="1600" i="1">
+                            <a:latin typeface="Cambria Math" panose="02040503050406030204" pitchFamily="18" charset="0"/>
+                          </a:rPr>
+                          <m:t>𝐷</m:t>
+                        </m:r>
+                      </m:e>
+                      <m:sub>
+                        <m:r>
+                          <a:rPr lang="ar-AE" sz="1600" i="1">
+                            <a:latin typeface="Cambria Math" panose="02040503050406030204" pitchFamily="18" charset="0"/>
+                          </a:rPr>
+                          <m:t>𝑖</m:t>
+                        </m:r>
+                      </m:sub>
+                    </m:sSub>
+                  </m:oMath>
+                </a14:m>
+                <a:r>
+                  <a:rPr lang="ar-AE" sz="1600" dirty="0"/>
+                  <a:t>= </a:t>
+                </a:r>
+                <a:r>
+                  <a:rPr lang="en-US" sz="1600" dirty="0"/>
+                  <a:t>traffic density</a:t>
+                </a:r>
+              </a:p>
+              <a:p>
+                <a:pPr marL="0" indent="0">
+                  <a:spcBef>
+                    <a:spcPts val="600"/>
+                  </a:spcBef>
+                  <a:buNone/>
+                </a:pPr>
+                <a14:m>
+                  <m:oMath xmlns:m="http://schemas.openxmlformats.org/officeDocument/2006/math">
+                    <m:sSub>
+                      <m:sSubPr>
+                        <m:ctrlPr>
+                          <a:rPr lang="ar-AE" sz="1600" i="1">
+                            <a:latin typeface="Cambria Math" panose="02040503050406030204" pitchFamily="18" charset="0"/>
+                          </a:rPr>
+                        </m:ctrlPr>
+                      </m:sSubPr>
+                      <m:e>
+                        <m:r>
+                          <a:rPr lang="ar-AE" sz="1600" i="1">
+                            <a:latin typeface="Cambria Math" panose="02040503050406030204" pitchFamily="18" charset="0"/>
+                          </a:rPr>
+                          <m:t>𝑄</m:t>
+                        </m:r>
+                      </m:e>
+                      <m:sub>
+                        <m:r>
+                          <a:rPr lang="ar-AE" sz="1600" i="1">
+                            <a:latin typeface="Cambria Math" panose="02040503050406030204" pitchFamily="18" charset="0"/>
+                          </a:rPr>
+                          <m:t>𝑖</m:t>
+                        </m:r>
+                      </m:sub>
+                    </m:sSub>
+                  </m:oMath>
+                </a14:m>
+                <a:r>
+                  <a:rPr lang="ar-AE" sz="1600" dirty="0"/>
+                  <a:t>= </a:t>
+                </a:r>
+                <a:r>
+                  <a:rPr lang="en-US" sz="1600" dirty="0"/>
+                  <a:t>queue length</a:t>
+                </a:r>
+              </a:p>
+              <a:p>
+                <a:pPr marL="0" indent="0">
+                  <a:spcBef>
+                    <a:spcPts val="600"/>
+                  </a:spcBef>
+                  <a:buNone/>
+                </a:pPr>
+                <a14:m>
+                  <m:oMath xmlns:m="http://schemas.openxmlformats.org/officeDocument/2006/math">
+                    <m:sSub>
+                      <m:sSubPr>
+                        <m:ctrlPr>
+                          <a:rPr lang="ar-AE" sz="1600" i="1" smtClean="0">
+                            <a:latin typeface="Cambria Math" panose="02040503050406030204" pitchFamily="18" charset="0"/>
+                          </a:rPr>
+                        </m:ctrlPr>
+                      </m:sSubPr>
+                      <m:e>
+                        <m:r>
+                          <a:rPr lang="ar-AE" sz="1600" i="1">
+                            <a:latin typeface="Cambria Math" panose="02040503050406030204" pitchFamily="18" charset="0"/>
+                          </a:rPr>
+                          <m:t>𝐸</m:t>
+                        </m:r>
+                      </m:e>
+                      <m:sub>
+                        <m:r>
+                          <a:rPr lang="ar-AE" sz="1600" i="1">
+                            <a:latin typeface="Cambria Math" panose="02040503050406030204" pitchFamily="18" charset="0"/>
+                          </a:rPr>
+                          <m:t>𝑖</m:t>
+                        </m:r>
+                      </m:sub>
+                    </m:sSub>
+                  </m:oMath>
+                </a14:m>
+                <a:r>
+                  <a:rPr lang="ar-AE" sz="1600" dirty="0"/>
+                  <a:t>= </a:t>
+                </a:r>
+                <a:r>
+                  <a:rPr lang="en-US" sz="1600" dirty="0"/>
+                  <a:t>emergency vehicle indicator</a:t>
+                </a:r>
+              </a:p>
+              <a:p>
+                <a:pPr marL="0" indent="0">
+                  <a:spcBef>
+                    <a:spcPts val="600"/>
+                  </a:spcBef>
+                  <a:buNone/>
+                </a:pPr>
+                <a:r>
+                  <a:rPr lang="en-US" sz="1600" b="1" dirty="0"/>
+                  <a:t>α, β, γ</a:t>
+                </a:r>
+                <a:r>
+                  <a:rPr lang="en-US" sz="1600" dirty="0"/>
+                  <a:t> → weighting factors</a:t>
+                </a:r>
+              </a:p>
+              <a:p>
+                <a:pPr marL="0" indent="0">
+                  <a:spcBef>
+                    <a:spcPts val="600"/>
+                  </a:spcBef>
+                  <a:buNone/>
+                </a:pPr>
+                <a:endParaRPr lang="en-US" sz="1600" dirty="0"/>
+              </a:p>
+              <a:p>
+                <a:endParaRPr lang="en-US" sz="1600" dirty="0"/>
+              </a:p>
+              <a:p>
+                <a:pPr marL="0" indent="0">
+                  <a:buNone/>
+                </a:pPr>
+                <a:endParaRPr lang="en-US" sz="1600" dirty="0"/>
+              </a:p>
+              <a:p>
+                <a:pPr marL="0" indent="0">
+                  <a:buNone/>
+                </a:pPr>
+                <a:endParaRPr lang="en-US" dirty="0"/>
+              </a:p>
+              <a:p>
+                <a:pPr marL="0" indent="0">
+                  <a:buNone/>
+                </a:pPr>
+                <a:endParaRPr lang="en-US" dirty="0"/>
+              </a:p>
+            </p:txBody>
+          </p:sp>
+        </mc:Choice>
+        <mc:Fallback>
+          <p:sp>
+            <p:nvSpPr>
+              <p:cNvPr id="13" name="Content Placeholder 12">
+                <a:extLst>
+                  <a:ext uri="{FF2B5EF4-FFF2-40B4-BE49-F238E27FC236}">
+                    <a16:creationId xmlns:a16="http://schemas.microsoft.com/office/drawing/2014/main" id="{CF2EB8D9-E378-E25E-C360-0F28B521C43B}"/>
+                  </a:ext>
+                </a:extLst>
+              </p:cNvPr>
+              <p:cNvSpPr>
+                <a:spLocks noGrp="1" noRot="1" noChangeAspect="1" noMove="1" noResize="1" noEditPoints="1" noAdjustHandles="1" noChangeArrowheads="1" noChangeShapeType="1" noTextEdit="1"/>
+              </p:cNvSpPr>
+              <p:nvPr>
+                <p:ph sz="half" idx="1"/>
+              </p:nvPr>
+            </p:nvSpPr>
+            <p:spPr>
+              <a:xfrm>
+                <a:off x="1" y="959357"/>
+                <a:ext cx="3768131" cy="5509091"/>
+              </a:xfrm>
+              <a:blipFill>
+                <a:blip r:embed="rId4"/>
+                <a:stretch>
+                  <a:fillRect l="-809" t="-996" r="-647"/>
+                </a:stretch>
+              </a:blipFill>
+            </p:spPr>
+            <p:txBody>
+              <a:bodyPr/>
+              <a:lstStyle/>
+              <a:p>
+                <a:r>
+                  <a:rPr lang="en-US">
+                    <a:noFill/>
+                  </a:rPr>
+                  <a:t> </a:t>
+                </a:r>
+              </a:p>
+            </p:txBody>
+          </p:sp>
+        </mc:Fallback>
+      </mc:AlternateContent>
+      <mc:AlternateContent xmlns:mc="http://schemas.openxmlformats.org/markup-compatibility/2006">
+        <mc:Choice xmlns:a14="http://schemas.microsoft.com/office/drawing/2010/main" Requires="a14">
+          <p:sp>
+            <p:nvSpPr>
+              <p:cNvPr id="14" name="Content Placeholder 13">
+                <a:extLst>
+                  <a:ext uri="{FF2B5EF4-FFF2-40B4-BE49-F238E27FC236}">
+                    <a16:creationId xmlns:a16="http://schemas.microsoft.com/office/drawing/2014/main" id="{BD276BAD-2CCC-A5FA-BC63-A1A4E809AB8D}"/>
+                  </a:ext>
+                </a:extLst>
+              </p:cNvPr>
+              <p:cNvSpPr>
+                <a:spLocks noGrp="1"/>
+              </p:cNvSpPr>
+              <p:nvPr>
+                <p:ph sz="half" idx="2"/>
+              </p:nvPr>
+            </p:nvSpPr>
+            <p:spPr>
+              <a:xfrm>
+                <a:off x="3768132" y="1016748"/>
+                <a:ext cx="3262365" cy="4151374"/>
+              </a:xfrm>
+            </p:spPr>
+            <p:txBody>
+              <a:bodyPr>
+                <a:normAutofit/>
+              </a:bodyPr>
+              <a:lstStyle/>
+              <a:p>
+                <a:pPr marL="0" indent="0">
+                  <a:buNone/>
+                </a:pPr>
+                <a:r>
+                  <a:rPr lang="en-US" sz="1600" b="1" dirty="0"/>
+                  <a:t>3️⃣ Adaptive Signal Timing</a:t>
+                </a:r>
+              </a:p>
+              <a:p>
+                <a:pPr marL="0" indent="0">
+                  <a:spcBef>
+                    <a:spcPts val="600"/>
+                  </a:spcBef>
+                  <a:buNone/>
+                </a:pPr>
+                <a14:m>
+                  <m:oMath xmlns:m="http://schemas.openxmlformats.org/officeDocument/2006/math">
+                    <m:sSub>
+                      <m:sSubPr>
+                        <m:ctrlPr>
+                          <a:rPr lang="ar-AE" sz="1600" i="1">
+                            <a:latin typeface="Cambria Math" panose="02040503050406030204" pitchFamily="18" charset="0"/>
+                          </a:rPr>
+                        </m:ctrlPr>
+                      </m:sSubPr>
+                      <m:e>
+                        <m:r>
+                          <a:rPr lang="ar-AE" sz="1600" i="1">
+                            <a:latin typeface="Cambria Math" panose="02040503050406030204" pitchFamily="18" charset="0"/>
+                          </a:rPr>
+                          <m:t>𝐺</m:t>
+                        </m:r>
+                      </m:e>
+                      <m:sub>
+                        <m:r>
+                          <a:rPr lang="ar-AE" sz="1600" i="1">
+                            <a:latin typeface="Cambria Math" panose="02040503050406030204" pitchFamily="18" charset="0"/>
+                          </a:rPr>
+                          <m:t>𝑖</m:t>
+                        </m:r>
+                      </m:sub>
+                    </m:sSub>
+                  </m:oMath>
+                </a14:m>
+                <a:r>
+                  <a:rPr lang="ar-AE" sz="1600" dirty="0"/>
+                  <a:t>=</a:t>
+                </a:r>
+                <a:r>
+                  <a:rPr lang="en-US" sz="1600" dirty="0"/>
+                  <a:t> </a:t>
+                </a:r>
+                <a:r>
+                  <a:rPr lang="ar-AE" sz="1600" dirty="0"/>
+                  <a:t> </a:t>
+                </a:r>
+                <a:r>
+                  <a:rPr lang="en-US" sz="1600" dirty="0"/>
+                  <a:t>green time for lane </a:t>
+                </a:r>
+                <a14:m>
+                  <m:oMath xmlns:m="http://schemas.openxmlformats.org/officeDocument/2006/math">
+                    <m:r>
+                      <a:rPr lang="en-US" sz="1600" i="1">
+                        <a:latin typeface="Cambria Math" panose="02040503050406030204" pitchFamily="18" charset="0"/>
+                      </a:rPr>
+                      <m:t>𝑖</m:t>
+                    </m:r>
+                  </m:oMath>
+                </a14:m>
+                <a:endParaRPr lang="en-US" sz="1600" dirty="0"/>
+              </a:p>
+              <a:p>
+                <a:pPr marL="0" indent="0">
+                  <a:spcBef>
+                    <a:spcPts val="600"/>
+                  </a:spcBef>
+                  <a:buNone/>
+                </a:pPr>
+                <a14:m>
+                  <m:oMath xmlns:m="http://schemas.openxmlformats.org/officeDocument/2006/math">
+                    <m:sSub>
+                      <m:sSubPr>
+                        <m:ctrlPr>
+                          <a:rPr lang="ar-AE" sz="1600" i="1">
+                            <a:latin typeface="Cambria Math" panose="02040503050406030204" pitchFamily="18" charset="0"/>
+                          </a:rPr>
+                        </m:ctrlPr>
+                      </m:sSubPr>
+                      <m:e>
+                        <m:r>
+                          <a:rPr lang="ar-AE" sz="1600" i="1">
+                            <a:latin typeface="Cambria Math" panose="02040503050406030204" pitchFamily="18" charset="0"/>
+                          </a:rPr>
+                          <m:t>𝐺</m:t>
+                        </m:r>
+                      </m:e>
+                      <m:sub>
+                        <m:r>
+                          <a:rPr lang="ar-AE" sz="1600" i="1">
+                            <a:latin typeface="Cambria Math" panose="02040503050406030204" pitchFamily="18" charset="0"/>
+                          </a:rPr>
+                          <m:t>𝑚𝑖𝑛</m:t>
+                        </m:r>
+                      </m:sub>
+                    </m:sSub>
+                  </m:oMath>
+                </a14:m>
+                <a:r>
+                  <a:rPr lang="ar-AE" sz="1600" dirty="0"/>
+                  <a:t>= </a:t>
+                </a:r>
+                <a:r>
+                  <a:rPr lang="en-US" sz="1600" dirty="0"/>
+                  <a:t>minimum green time</a:t>
+                </a:r>
+              </a:p>
+              <a:p>
+                <a:pPr marL="0" indent="0">
+                  <a:spcBef>
+                    <a:spcPts val="600"/>
+                  </a:spcBef>
+                  <a:buNone/>
+                </a:pPr>
+                <a14:m>
+                  <m:oMath xmlns:m="http://schemas.openxmlformats.org/officeDocument/2006/math">
+                    <m:r>
+                      <a:rPr lang="en-US" sz="1600" i="1">
+                        <a:latin typeface="Cambria Math" panose="02040503050406030204" pitchFamily="18" charset="0"/>
+                      </a:rPr>
+                      <m:t>𝑘</m:t>
+                    </m:r>
+                  </m:oMath>
+                </a14:m>
+                <a:r>
+                  <a:rPr lang="en-US" sz="1600" dirty="0"/>
+                  <a:t>= scaling factor</a:t>
+                </a:r>
+              </a:p>
+              <a:p>
+                <a:pPr marL="0" indent="0">
+                  <a:spcBef>
+                    <a:spcPts val="600"/>
+                  </a:spcBef>
+                  <a:buNone/>
+                </a:pPr>
+                <a:endParaRPr lang="en-US" sz="1600" dirty="0"/>
+              </a:p>
+              <a:p>
+                <a:pPr marL="0" indent="0">
+                  <a:buNone/>
+                </a:pPr>
+                <a:endParaRPr lang="en-US" sz="1600" dirty="0"/>
+              </a:p>
+              <a:p>
+                <a:pPr marL="0" indent="0">
+                  <a:buNone/>
+                </a:pPr>
+                <a:r>
+                  <a:rPr lang="en-US" sz="1600" dirty="0"/>
+                  <a:t>4️⃣</a:t>
+                </a:r>
+                <a:r>
+                  <a:rPr lang="en-US" sz="1600" b="1" dirty="0"/>
+                  <a:t>Deadlock Detection </a:t>
+                </a:r>
+              </a:p>
+              <a:p>
+                <a:pPr>
+                  <a:spcBef>
+                    <a:spcPts val="300"/>
+                  </a:spcBef>
+                </a:pPr>
+                <a:r>
+                  <a:rPr lang="en-US" sz="1600" dirty="0"/>
+                  <a:t>Deadlock occurs when vehicles </a:t>
+                </a:r>
+              </a:p>
+              <a:p>
+                <a:pPr marL="0" indent="0">
+                  <a:spcBef>
+                    <a:spcPts val="300"/>
+                  </a:spcBef>
+                  <a:buNone/>
+                </a:pPr>
+                <a:r>
+                  <a:rPr lang="en-US" sz="1600" dirty="0"/>
+                  <a:t>block the </a:t>
+                </a:r>
+                <a:r>
+                  <a:rPr lang="en-US" sz="1600" b="1" dirty="0"/>
+                  <a:t>intersection box</a:t>
+                </a:r>
+                <a:r>
+                  <a:rPr lang="en-US" sz="1600" dirty="0"/>
+                  <a:t>.</a:t>
+                </a:r>
+              </a:p>
+              <a:p>
+                <a:pPr marL="0" indent="0">
+                  <a:spcBef>
+                    <a:spcPts val="600"/>
+                  </a:spcBef>
+                  <a:buNone/>
+                </a:pPr>
+                <a14:m>
+                  <m:oMath xmlns:m="http://schemas.openxmlformats.org/officeDocument/2006/math">
+                    <m:r>
+                      <a:rPr lang="en-US" sz="1600" i="1">
+                        <a:latin typeface="Cambria Math" panose="02040503050406030204" pitchFamily="18" charset="0"/>
+                      </a:rPr>
+                      <m:t>𝐵</m:t>
+                    </m:r>
+                  </m:oMath>
+                </a14:m>
+                <a:r>
+                  <a:rPr lang="en-US" sz="1600" dirty="0"/>
+                  <a:t>= vehicles in intersection box</a:t>
+                </a:r>
+              </a:p>
+              <a:p>
+                <a:pPr marL="0" indent="0">
+                  <a:spcBef>
+                    <a:spcPts val="600"/>
+                  </a:spcBef>
+                  <a:buNone/>
+                </a:pPr>
+                <a14:m>
+                  <m:oMath xmlns:m="http://schemas.openxmlformats.org/officeDocument/2006/math">
+                    <m:sSub>
+                      <m:sSubPr>
+                        <m:ctrlPr>
+                          <a:rPr lang="ar-AE" sz="1600" i="1">
+                            <a:latin typeface="Cambria Math" panose="02040503050406030204" pitchFamily="18" charset="0"/>
+                          </a:rPr>
+                        </m:ctrlPr>
+                      </m:sSubPr>
+                      <m:e>
+                        <m:r>
+                          <a:rPr lang="ar-AE" sz="1600" i="1">
+                            <a:latin typeface="Cambria Math" panose="02040503050406030204" pitchFamily="18" charset="0"/>
+                          </a:rPr>
+                          <m:t>𝐸</m:t>
+                        </m:r>
+                      </m:e>
+                      <m:sub>
+                        <m:r>
+                          <a:rPr lang="ar-AE" sz="1600" i="1">
+                            <a:latin typeface="Cambria Math" panose="02040503050406030204" pitchFamily="18" charset="0"/>
+                          </a:rPr>
+                          <m:t>𝑖</m:t>
+                        </m:r>
+                      </m:sub>
+                    </m:sSub>
+                  </m:oMath>
+                </a14:m>
+                <a:r>
+                  <a:rPr lang="ar-AE" sz="1600" dirty="0"/>
+                  <a:t>= </a:t>
+                </a:r>
+                <a:r>
+                  <a:rPr lang="en-US" sz="1600" dirty="0"/>
+                  <a:t>exit lane occupancy</a:t>
+                </a:r>
+              </a:p>
+              <a:p>
+                <a:pPr marL="0" indent="0">
+                  <a:spcBef>
+                    <a:spcPts val="600"/>
+                  </a:spcBef>
+                  <a:buNone/>
+                </a:pPr>
+                <a14:m>
+                  <m:oMath xmlns:m="http://schemas.openxmlformats.org/officeDocument/2006/math">
+                    <m:r>
+                      <a:rPr lang="en-US" sz="1600" i="1">
+                        <a:latin typeface="Cambria Math" panose="02040503050406030204" pitchFamily="18" charset="0"/>
+                      </a:rPr>
+                      <m:t>𝑣</m:t>
+                    </m:r>
+                  </m:oMath>
+                </a14:m>
+                <a:r>
+                  <a:rPr lang="en-US" sz="1600" dirty="0"/>
+                  <a:t>= vehicle speed</a:t>
+                </a:r>
+              </a:p>
+              <a:p>
+                <a:pPr marL="0" indent="0">
+                  <a:spcBef>
+                    <a:spcPts val="600"/>
+                  </a:spcBef>
+                  <a:buNone/>
+                </a:pPr>
+                <a:r>
+                  <a:rPr lang="en-US" sz="1600" dirty="0"/>
+                  <a:t>Detection condition:</a:t>
+                </a:r>
+              </a:p>
+              <a:p>
+                <a:pPr marL="0" indent="0">
+                  <a:buNone/>
+                </a:pPr>
+                <a:endParaRPr lang="en-US" sz="1600" dirty="0"/>
+              </a:p>
+              <a:p>
+                <a:pPr marL="0" indent="0">
+                  <a:spcBef>
+                    <a:spcPts val="600"/>
+                  </a:spcBef>
+                  <a:buNone/>
+                </a:pPr>
+                <a:endParaRPr lang="en-US" sz="1600" dirty="0"/>
+              </a:p>
+            </p:txBody>
+          </p:sp>
+        </mc:Choice>
+        <mc:Fallback>
+          <p:sp>
+            <p:nvSpPr>
+              <p:cNvPr id="14" name="Content Placeholder 13">
+                <a:extLst>
+                  <a:ext uri="{FF2B5EF4-FFF2-40B4-BE49-F238E27FC236}">
+                    <a16:creationId xmlns:a16="http://schemas.microsoft.com/office/drawing/2014/main" id="{BD276BAD-2CCC-A5FA-BC63-A1A4E809AB8D}"/>
+                  </a:ext>
+                </a:extLst>
+              </p:cNvPr>
+              <p:cNvSpPr>
+                <a:spLocks noGrp="1" noRot="1" noChangeAspect="1" noMove="1" noResize="1" noEditPoints="1" noAdjustHandles="1" noChangeArrowheads="1" noChangeShapeType="1" noTextEdit="1"/>
+              </p:cNvSpPr>
+              <p:nvPr>
+                <p:ph sz="half" idx="2"/>
+              </p:nvPr>
+            </p:nvSpPr>
+            <p:spPr>
+              <a:xfrm>
+                <a:off x="3768132" y="1016748"/>
+                <a:ext cx="3262365" cy="4151374"/>
+              </a:xfrm>
+              <a:blipFill>
+                <a:blip r:embed="rId5"/>
+                <a:stretch>
+                  <a:fillRect l="-935" t="-1322"/>
+                </a:stretch>
+              </a:blipFill>
+            </p:spPr>
+            <p:txBody>
+              <a:bodyPr/>
+              <a:lstStyle/>
+              <a:p>
+                <a:r>
+                  <a:rPr lang="en-US">
+                    <a:noFill/>
+                  </a:rPr>
+                  <a:t> </a:t>
+                </a:r>
+              </a:p>
+            </p:txBody>
+          </p:sp>
+        </mc:Fallback>
+      </mc:AlternateContent>
       <p:grpSp>
         <p:nvGrpSpPr>
           <p:cNvPr id="2" name="Group 1">
@@ -4988,6 +6120,1348 @@
           </p:txBody>
         </p:sp>
       </p:grpSp>
+      <p:sp>
+        <p:nvSpPr>
+          <p:cNvPr id="15" name="Rectangle 14">
+            <a:extLst>
+              <a:ext uri="{FF2B5EF4-FFF2-40B4-BE49-F238E27FC236}">
+                <a16:creationId xmlns:a16="http://schemas.microsoft.com/office/drawing/2014/main" id="{78E44542-89D3-BFBA-FACF-3270F94938D3}"/>
+              </a:ext>
+            </a:extLst>
+          </p:cNvPr>
+          <p:cNvSpPr/>
+          <p:nvPr/>
+        </p:nvSpPr>
+        <p:spPr>
+          <a:xfrm>
+            <a:off x="90435" y="2200589"/>
+            <a:ext cx="1326383" cy="377301"/>
+          </a:xfrm>
+          <a:prstGeom prst="rect">
+            <a:avLst/>
+          </a:prstGeom>
+          <a:ln>
+            <a:solidFill>
+              <a:schemeClr val="accent1">
+                <a:lumMod val="75000"/>
+              </a:schemeClr>
+            </a:solidFill>
+          </a:ln>
+        </p:spPr>
+        <p:style>
+          <a:lnRef idx="2">
+            <a:schemeClr val="accent6"/>
+          </a:lnRef>
+          <a:fillRef idx="1">
+            <a:schemeClr val="lt1"/>
+          </a:fillRef>
+          <a:effectRef idx="0">
+            <a:schemeClr val="accent6"/>
+          </a:effectRef>
+          <a:fontRef idx="minor">
+            <a:schemeClr val="dk1"/>
+          </a:fontRef>
+        </p:style>
+        <p:txBody>
+          <a:bodyPr rtlCol="0" anchor="ctr"/>
+          <a:lstStyle/>
+          <a:p>
+            <a:pPr algn="ctr"/>
+            <a:r>
+              <a:rPr lang="en-US" i="1" dirty="0"/>
+              <a:t>Dᵢ = Nᵢ / Lᵢ</a:t>
+            </a:r>
+          </a:p>
+        </p:txBody>
+      </p:sp>
+      <mc:AlternateContent xmlns:mc="http://schemas.openxmlformats.org/markup-compatibility/2006">
+        <mc:Choice xmlns:a14="http://schemas.microsoft.com/office/drawing/2010/main" Requires="a14">
+          <p:sp>
+            <p:nvSpPr>
+              <p:cNvPr id="16" name="Rectangle 15">
+                <a:extLst>
+                  <a:ext uri="{FF2B5EF4-FFF2-40B4-BE49-F238E27FC236}">
+                    <a16:creationId xmlns:a16="http://schemas.microsoft.com/office/drawing/2014/main" id="{8EDF1112-5275-DE46-D756-7CCD70A2C2EA}"/>
+                  </a:ext>
+                </a:extLst>
+              </p:cNvPr>
+              <p:cNvSpPr/>
+              <p:nvPr/>
+            </p:nvSpPr>
+            <p:spPr>
+              <a:xfrm>
+                <a:off x="0" y="5788040"/>
+                <a:ext cx="2994409" cy="457689"/>
+              </a:xfrm>
+              <a:prstGeom prst="rect">
+                <a:avLst/>
+              </a:prstGeom>
+              <a:ln>
+                <a:solidFill>
+                  <a:schemeClr val="accent1">
+                    <a:lumMod val="50000"/>
+                  </a:schemeClr>
+                </a:solidFill>
+              </a:ln>
+            </p:spPr>
+            <p:style>
+              <a:lnRef idx="2">
+                <a:schemeClr val="accent6"/>
+              </a:lnRef>
+              <a:fillRef idx="1">
+                <a:schemeClr val="lt1"/>
+              </a:fillRef>
+              <a:effectRef idx="0">
+                <a:schemeClr val="accent6"/>
+              </a:effectRef>
+              <a:fontRef idx="minor">
+                <a:schemeClr val="dk1"/>
+              </a:fontRef>
+            </p:style>
+            <p:txBody>
+              <a:bodyPr rtlCol="0" anchor="ctr"/>
+              <a:lstStyle/>
+              <a:p>
+                <a:pPr algn="ctr"/>
+                <a:r>
+                  <a:rPr lang="en-US" i="1" dirty="0"/>
+                  <a:t>Pᵢ = </a:t>
+                </a:r>
+                <a:r>
+                  <a:rPr lang="el-GR" i="1" dirty="0"/>
+                  <a:t>α</a:t>
+                </a:r>
+                <a:r>
+                  <a:rPr lang="en-US" i="1" dirty="0"/>
+                  <a:t>Dᵢ + </a:t>
+                </a:r>
+                <a:r>
+                  <a:rPr lang="el-GR" i="1" dirty="0"/>
+                  <a:t>β</a:t>
+                </a:r>
+                <a:r>
+                  <a:rPr lang="en-US" i="1" dirty="0"/>
+                  <a:t>Qᵢ + </a:t>
+                </a:r>
+                <a:r>
+                  <a:rPr lang="el-GR" i="1" dirty="0"/>
+                  <a:t>γ</a:t>
+                </a:r>
+                <a:r>
+                  <a:rPr lang="en-US" i="1" dirty="0"/>
+                  <a:t>Eᵢ  , </a:t>
+                </a:r>
+                <a14:m>
+                  <m:oMath xmlns:m="http://schemas.openxmlformats.org/officeDocument/2006/math">
+                    <m:r>
+                      <a:rPr lang="en-US" i="1">
+                        <a:latin typeface="Cambria Math" panose="02040503050406030204" pitchFamily="18" charset="0"/>
+                      </a:rPr>
+                      <m:t>𝛾</m:t>
+                    </m:r>
+                    <m:r>
+                      <a:rPr lang="en-US">
+                        <a:latin typeface="Cambria Math" panose="02040503050406030204" pitchFamily="18" charset="0"/>
+                      </a:rPr>
+                      <m:t>≫</m:t>
+                    </m:r>
+                    <m:r>
+                      <a:rPr lang="en-US" i="1">
+                        <a:latin typeface="Cambria Math" panose="02040503050406030204" pitchFamily="18" charset="0"/>
+                      </a:rPr>
+                      <m:t>𝛼</m:t>
+                    </m:r>
+                    <m:r>
+                      <a:rPr lang="en-US">
+                        <a:latin typeface="Cambria Math" panose="02040503050406030204" pitchFamily="18" charset="0"/>
+                      </a:rPr>
+                      <m:t>,</m:t>
+                    </m:r>
+                    <m:r>
+                      <a:rPr lang="en-US" i="1">
+                        <a:latin typeface="Cambria Math" panose="02040503050406030204" pitchFamily="18" charset="0"/>
+                      </a:rPr>
+                      <m:t>𝛽</m:t>
+                    </m:r>
+                  </m:oMath>
+                </a14:m>
+                <a:endParaRPr lang="en-US" sz="1100" dirty="0"/>
+              </a:p>
+            </p:txBody>
+          </p:sp>
+        </mc:Choice>
+        <mc:Fallback>
+          <p:sp>
+            <p:nvSpPr>
+              <p:cNvPr id="16" name="Rectangle 15">
+                <a:extLst>
+                  <a:ext uri="{FF2B5EF4-FFF2-40B4-BE49-F238E27FC236}">
+                    <a16:creationId xmlns:a16="http://schemas.microsoft.com/office/drawing/2014/main" id="{8EDF1112-5275-DE46-D756-7CCD70A2C2EA}"/>
+                  </a:ext>
+                </a:extLst>
+              </p:cNvPr>
+              <p:cNvSpPr>
+                <a:spLocks noRot="1" noChangeAspect="1" noMove="1" noResize="1" noEditPoints="1" noAdjustHandles="1" noChangeArrowheads="1" noChangeShapeType="1" noTextEdit="1"/>
+              </p:cNvSpPr>
+              <p:nvPr/>
+            </p:nvSpPr>
+            <p:spPr>
+              <a:xfrm>
+                <a:off x="0" y="5788040"/>
+                <a:ext cx="2994409" cy="457689"/>
+              </a:xfrm>
+              <a:prstGeom prst="rect">
+                <a:avLst/>
+              </a:prstGeom>
+              <a:blipFill>
+                <a:blip r:embed="rId6"/>
+                <a:stretch>
+                  <a:fillRect l="-203" b="-8974"/>
+                </a:stretch>
+              </a:blipFill>
+              <a:ln>
+                <a:solidFill>
+                  <a:schemeClr val="accent1">
+                    <a:lumMod val="50000"/>
+                  </a:schemeClr>
+                </a:solidFill>
+              </a:ln>
+            </p:spPr>
+            <p:txBody>
+              <a:bodyPr/>
+              <a:lstStyle/>
+              <a:p>
+                <a:r>
+                  <a:rPr lang="en-US">
+                    <a:noFill/>
+                  </a:rPr>
+                  <a:t> </a:t>
+                </a:r>
+              </a:p>
+            </p:txBody>
+          </p:sp>
+        </mc:Fallback>
+      </mc:AlternateContent>
+      <mc:AlternateContent xmlns:mc="http://schemas.openxmlformats.org/markup-compatibility/2006">
+        <mc:Choice xmlns:a14="http://schemas.microsoft.com/office/drawing/2010/main" Requires="a14">
+          <p:sp>
+            <p:nvSpPr>
+              <p:cNvPr id="17" name="Rectangle 16">
+                <a:extLst>
+                  <a:ext uri="{FF2B5EF4-FFF2-40B4-BE49-F238E27FC236}">
+                    <a16:creationId xmlns:a16="http://schemas.microsoft.com/office/drawing/2014/main" id="{18E09C42-672A-784C-D8C4-A27C7308CB30}"/>
+                  </a:ext>
+                </a:extLst>
+              </p:cNvPr>
+              <p:cNvSpPr/>
+              <p:nvPr/>
+            </p:nvSpPr>
+            <p:spPr>
+              <a:xfrm>
+                <a:off x="4513384" y="2200589"/>
+                <a:ext cx="1868994" cy="377301"/>
+              </a:xfrm>
+              <a:prstGeom prst="rect">
+                <a:avLst/>
+              </a:prstGeom>
+              <a:ln>
+                <a:solidFill>
+                  <a:schemeClr val="accent1">
+                    <a:lumMod val="50000"/>
+                  </a:schemeClr>
+                </a:solidFill>
+              </a:ln>
+            </p:spPr>
+            <p:style>
+              <a:lnRef idx="2">
+                <a:schemeClr val="accent6"/>
+              </a:lnRef>
+              <a:fillRef idx="1">
+                <a:schemeClr val="lt1"/>
+              </a:fillRef>
+              <a:effectRef idx="0">
+                <a:schemeClr val="accent6"/>
+              </a:effectRef>
+              <a:fontRef idx="minor">
+                <a:schemeClr val="dk1"/>
+              </a:fontRef>
+            </p:style>
+            <p:txBody>
+              <a:bodyPr rtlCol="0" anchor="ctr"/>
+              <a:lstStyle/>
+              <a:p>
+                <a:pPr algn="ctr"/>
+                <a:r>
+                  <a:rPr lang="en-US" i="1" dirty="0"/>
+                  <a:t>Gi​=</a:t>
+                </a:r>
+                <a:r>
+                  <a:rPr lang="ar-AE" dirty="0"/>
+                  <a:t> </a:t>
+                </a:r>
+                <a14:m>
+                  <m:oMath xmlns:m="http://schemas.openxmlformats.org/officeDocument/2006/math">
+                    <m:sSub>
+                      <m:sSubPr>
+                        <m:ctrlPr>
+                          <a:rPr lang="ar-AE" i="1">
+                            <a:latin typeface="Cambria Math" panose="02040503050406030204" pitchFamily="18" charset="0"/>
+                          </a:rPr>
+                        </m:ctrlPr>
+                      </m:sSubPr>
+                      <m:e>
+                        <m:r>
+                          <a:rPr lang="ar-AE" i="1">
+                            <a:latin typeface="Cambria Math" panose="02040503050406030204" pitchFamily="18" charset="0"/>
+                          </a:rPr>
+                          <m:t>𝐺</m:t>
+                        </m:r>
+                      </m:e>
+                      <m:sub>
+                        <m:r>
+                          <a:rPr lang="ar-AE" i="1">
+                            <a:latin typeface="Cambria Math" panose="02040503050406030204" pitchFamily="18" charset="0"/>
+                          </a:rPr>
+                          <m:t>𝑚𝑖𝑛</m:t>
+                        </m:r>
+                      </m:sub>
+                    </m:sSub>
+                    <m:r>
+                      <a:rPr lang="ar-AE" i="1">
+                        <a:latin typeface="Cambria Math" panose="02040503050406030204" pitchFamily="18" charset="0"/>
+                      </a:rPr>
+                      <m:t> </m:t>
+                    </m:r>
+                  </m:oMath>
+                </a14:m>
+                <a:r>
+                  <a:rPr lang="en-US" i="1" dirty="0"/>
+                  <a:t>​+ k *Di​</a:t>
+                </a:r>
+              </a:p>
+            </p:txBody>
+          </p:sp>
+        </mc:Choice>
+        <mc:Fallback>
+          <p:sp>
+            <p:nvSpPr>
+              <p:cNvPr id="17" name="Rectangle 16">
+                <a:extLst>
+                  <a:ext uri="{FF2B5EF4-FFF2-40B4-BE49-F238E27FC236}">
+                    <a16:creationId xmlns:a16="http://schemas.microsoft.com/office/drawing/2014/main" id="{18E09C42-672A-784C-D8C4-A27C7308CB30}"/>
+                  </a:ext>
+                </a:extLst>
+              </p:cNvPr>
+              <p:cNvSpPr>
+                <a:spLocks noRot="1" noChangeAspect="1" noMove="1" noResize="1" noEditPoints="1" noAdjustHandles="1" noChangeArrowheads="1" noChangeShapeType="1" noTextEdit="1"/>
+              </p:cNvSpPr>
+              <p:nvPr/>
+            </p:nvSpPr>
+            <p:spPr>
+              <a:xfrm>
+                <a:off x="4513384" y="2200589"/>
+                <a:ext cx="1868994" cy="377301"/>
+              </a:xfrm>
+              <a:prstGeom prst="rect">
+                <a:avLst/>
+              </a:prstGeom>
+              <a:blipFill>
+                <a:blip r:embed="rId7"/>
+                <a:stretch>
+                  <a:fillRect t="-7813" b="-21875"/>
+                </a:stretch>
+              </a:blipFill>
+              <a:ln>
+                <a:solidFill>
+                  <a:schemeClr val="accent1">
+                    <a:lumMod val="50000"/>
+                  </a:schemeClr>
+                </a:solidFill>
+              </a:ln>
+            </p:spPr>
+            <p:txBody>
+              <a:bodyPr/>
+              <a:lstStyle/>
+              <a:p>
+                <a:r>
+                  <a:rPr lang="en-US">
+                    <a:noFill/>
+                  </a:rPr>
+                  <a:t> </a:t>
+                </a:r>
+              </a:p>
+            </p:txBody>
+          </p:sp>
+        </mc:Fallback>
+      </mc:AlternateContent>
+      <mc:AlternateContent xmlns:mc="http://schemas.openxmlformats.org/markup-compatibility/2006">
+        <mc:Choice xmlns:a14="http://schemas.microsoft.com/office/drawing/2010/main" Requires="a14">
+          <p:sp>
+            <p:nvSpPr>
+              <p:cNvPr id="18" name="Rectangle 17">
+                <a:extLst>
+                  <a:ext uri="{FF2B5EF4-FFF2-40B4-BE49-F238E27FC236}">
+                    <a16:creationId xmlns:a16="http://schemas.microsoft.com/office/drawing/2014/main" id="{E2DF53AD-3A61-864C-BDB1-51D22E462422}"/>
+                  </a:ext>
+                </a:extLst>
+              </p:cNvPr>
+              <p:cNvSpPr/>
+              <p:nvPr/>
+            </p:nvSpPr>
+            <p:spPr>
+              <a:xfrm>
+                <a:off x="3865265" y="4790821"/>
+                <a:ext cx="3165232" cy="377301"/>
+              </a:xfrm>
+              <a:prstGeom prst="rect">
+                <a:avLst/>
+              </a:prstGeom>
+              <a:ln>
+                <a:solidFill>
+                  <a:schemeClr val="accent1">
+                    <a:lumMod val="50000"/>
+                  </a:schemeClr>
+                </a:solidFill>
+              </a:ln>
+            </p:spPr>
+            <p:style>
+              <a:lnRef idx="2">
+                <a:schemeClr val="accent6"/>
+              </a:lnRef>
+              <a:fillRef idx="1">
+                <a:schemeClr val="lt1"/>
+              </a:fillRef>
+              <a:effectRef idx="0">
+                <a:schemeClr val="accent6"/>
+              </a:effectRef>
+              <a:fontRef idx="minor">
+                <a:schemeClr val="dk1"/>
+              </a:fontRef>
+            </p:style>
+            <p:txBody>
+              <a:bodyPr rtlCol="0" anchor="ctr"/>
+              <a:lstStyle/>
+              <a:p>
+                <a:pPr algn="ctr"/>
+                <a14:m>
+                  <m:oMathPara xmlns:m="http://schemas.openxmlformats.org/officeDocument/2006/math">
+                    <m:oMathParaPr>
+                      <m:jc m:val="centerGroup"/>
+                    </m:oMathParaPr>
+                    <m:oMath xmlns:m="http://schemas.openxmlformats.org/officeDocument/2006/math">
+                      <m:r>
+                        <a:rPr lang="en-US" sz="1200" i="1">
+                          <a:latin typeface="Cambria Math" panose="02040503050406030204" pitchFamily="18" charset="0"/>
+                        </a:rPr>
+                        <m:t>𝐷𝑒𝑎𝑑𝑙𝑜𝑐𝑘</m:t>
+                      </m:r>
+                      <m:r>
+                        <a:rPr lang="en-US" sz="1200">
+                          <a:latin typeface="Cambria Math" panose="02040503050406030204" pitchFamily="18" charset="0"/>
+                        </a:rPr>
+                        <m:t>=</m:t>
+                      </m:r>
+                      <m:d>
+                        <m:dPr>
+                          <m:ctrlPr>
+                            <a:rPr lang="ar-AE" sz="1200" i="1">
+                              <a:latin typeface="Cambria Math" panose="02040503050406030204" pitchFamily="18" charset="0"/>
+                            </a:rPr>
+                          </m:ctrlPr>
+                        </m:dPr>
+                        <m:e>
+                          <m:r>
+                            <a:rPr lang="ar-AE" sz="1200" i="1">
+                              <a:latin typeface="Cambria Math" panose="02040503050406030204" pitchFamily="18" charset="0"/>
+                            </a:rPr>
+                            <m:t>𝐵</m:t>
+                          </m:r>
+                          <m:r>
+                            <a:rPr lang="ar-AE" sz="1200">
+                              <a:latin typeface="Cambria Math" panose="02040503050406030204" pitchFamily="18" charset="0"/>
+                            </a:rPr>
+                            <m:t>&gt;</m:t>
+                          </m:r>
+                          <m:sSub>
+                            <m:sSubPr>
+                              <m:ctrlPr>
+                                <a:rPr lang="ar-AE" sz="1200" i="1">
+                                  <a:latin typeface="Cambria Math" panose="02040503050406030204" pitchFamily="18" charset="0"/>
+                                </a:rPr>
+                              </m:ctrlPr>
+                            </m:sSubPr>
+                            <m:e>
+                              <m:r>
+                                <a:rPr lang="ar-AE" sz="1200" i="1">
+                                  <a:latin typeface="Cambria Math" panose="02040503050406030204" pitchFamily="18" charset="0"/>
+                                </a:rPr>
+                                <m:t>𝐵</m:t>
+                              </m:r>
+                            </m:e>
+                            <m:sub>
+                              <m:r>
+                                <a:rPr lang="ar-AE" sz="1200" i="1">
+                                  <a:latin typeface="Cambria Math" panose="02040503050406030204" pitchFamily="18" charset="0"/>
+                                </a:rPr>
+                                <m:t>𝑡</m:t>
+                              </m:r>
+                              <m:r>
+                                <a:rPr lang="ar-AE" sz="1200" i="1">
+                                  <a:latin typeface="Cambria Math" panose="02040503050406030204" pitchFamily="18" charset="0"/>
+                                </a:rPr>
+                                <m:t>h</m:t>
+                              </m:r>
+                            </m:sub>
+                          </m:sSub>
+                        </m:e>
+                      </m:d>
+                      <m:r>
+                        <a:rPr lang="ar-AE" sz="1200">
+                          <a:latin typeface="Cambria Math" panose="02040503050406030204" pitchFamily="18" charset="0"/>
+                        </a:rPr>
+                        <m:t>∧</m:t>
+                      </m:r>
+                      <m:d>
+                        <m:dPr>
+                          <m:ctrlPr>
+                            <a:rPr lang="ar-AE" sz="1200" i="1">
+                              <a:latin typeface="Cambria Math" panose="02040503050406030204" pitchFamily="18" charset="0"/>
+                            </a:rPr>
+                          </m:ctrlPr>
+                        </m:dPr>
+                        <m:e>
+                          <m:sSub>
+                            <m:sSubPr>
+                              <m:ctrlPr>
+                                <a:rPr lang="ar-AE" sz="1200" i="1">
+                                  <a:latin typeface="Cambria Math" panose="02040503050406030204" pitchFamily="18" charset="0"/>
+                                </a:rPr>
+                              </m:ctrlPr>
+                            </m:sSubPr>
+                            <m:e>
+                              <m:r>
+                                <a:rPr lang="ar-AE" sz="1200" i="1">
+                                  <a:latin typeface="Cambria Math" panose="02040503050406030204" pitchFamily="18" charset="0"/>
+                                </a:rPr>
+                                <m:t>𝐸</m:t>
+                              </m:r>
+                            </m:e>
+                            <m:sub>
+                              <m:r>
+                                <a:rPr lang="ar-AE" sz="1200" i="1">
+                                  <a:latin typeface="Cambria Math" panose="02040503050406030204" pitchFamily="18" charset="0"/>
+                                </a:rPr>
+                                <m:t>𝑖</m:t>
+                              </m:r>
+                            </m:sub>
+                          </m:sSub>
+                          <m:r>
+                            <a:rPr lang="ar-AE" sz="1200">
+                              <a:latin typeface="Cambria Math" panose="02040503050406030204" pitchFamily="18" charset="0"/>
+                            </a:rPr>
+                            <m:t>&gt;</m:t>
+                          </m:r>
+                          <m:sSub>
+                            <m:sSubPr>
+                              <m:ctrlPr>
+                                <a:rPr lang="ar-AE" sz="1200" i="1">
+                                  <a:latin typeface="Cambria Math" panose="02040503050406030204" pitchFamily="18" charset="0"/>
+                                </a:rPr>
+                              </m:ctrlPr>
+                            </m:sSubPr>
+                            <m:e>
+                              <m:r>
+                                <a:rPr lang="ar-AE" sz="1200" i="1">
+                                  <a:latin typeface="Cambria Math" panose="02040503050406030204" pitchFamily="18" charset="0"/>
+                                </a:rPr>
+                                <m:t>𝐸</m:t>
+                              </m:r>
+                            </m:e>
+                            <m:sub>
+                              <m:r>
+                                <a:rPr lang="ar-AE" sz="1200" i="1">
+                                  <a:latin typeface="Cambria Math" panose="02040503050406030204" pitchFamily="18" charset="0"/>
+                                </a:rPr>
+                                <m:t>𝑡</m:t>
+                              </m:r>
+                              <m:r>
+                                <a:rPr lang="ar-AE" sz="1200" i="1">
+                                  <a:latin typeface="Cambria Math" panose="02040503050406030204" pitchFamily="18" charset="0"/>
+                                </a:rPr>
+                                <m:t>h</m:t>
+                              </m:r>
+                            </m:sub>
+                          </m:sSub>
+                        </m:e>
+                      </m:d>
+                      <m:r>
+                        <a:rPr lang="ar-AE" sz="1200">
+                          <a:latin typeface="Cambria Math" panose="02040503050406030204" pitchFamily="18" charset="0"/>
+                        </a:rPr>
+                        <m:t>∧</m:t>
+                      </m:r>
+                      <m:d>
+                        <m:dPr>
+                          <m:ctrlPr>
+                            <a:rPr lang="ar-AE" sz="1200" i="1">
+                              <a:latin typeface="Cambria Math" panose="02040503050406030204" pitchFamily="18" charset="0"/>
+                            </a:rPr>
+                          </m:ctrlPr>
+                        </m:dPr>
+                        <m:e>
+                          <m:r>
+                            <a:rPr lang="ar-AE" sz="1200" i="1">
+                              <a:latin typeface="Cambria Math" panose="02040503050406030204" pitchFamily="18" charset="0"/>
+                            </a:rPr>
+                            <m:t>𝑣</m:t>
+                          </m:r>
+                          <m:r>
+                            <a:rPr lang="ar-AE" sz="1200">
+                              <a:latin typeface="Cambria Math" panose="02040503050406030204" pitchFamily="18" charset="0"/>
+                            </a:rPr>
+                            <m:t>≈</m:t>
+                          </m:r>
+                          <m:r>
+                            <a:rPr lang="ar-AE" sz="1200">
+                              <a:latin typeface="Cambria Math" panose="02040503050406030204" pitchFamily="18" charset="0"/>
+                            </a:rPr>
+                            <m:t>0</m:t>
+                          </m:r>
+                        </m:e>
+                      </m:d>
+                    </m:oMath>
+                  </m:oMathPara>
+                </a14:m>
+                <a:endParaRPr lang="en-US" sz="1200" dirty="0"/>
+              </a:p>
+            </p:txBody>
+          </p:sp>
+        </mc:Choice>
+        <mc:Fallback>
+          <p:sp>
+            <p:nvSpPr>
+              <p:cNvPr id="18" name="Rectangle 17">
+                <a:extLst>
+                  <a:ext uri="{FF2B5EF4-FFF2-40B4-BE49-F238E27FC236}">
+                    <a16:creationId xmlns:a16="http://schemas.microsoft.com/office/drawing/2014/main" id="{E2DF53AD-3A61-864C-BDB1-51D22E462422}"/>
+                  </a:ext>
+                </a:extLst>
+              </p:cNvPr>
+              <p:cNvSpPr>
+                <a:spLocks noRot="1" noChangeAspect="1" noMove="1" noResize="1" noEditPoints="1" noAdjustHandles="1" noChangeArrowheads="1" noChangeShapeType="1" noTextEdit="1"/>
+              </p:cNvSpPr>
+              <p:nvPr/>
+            </p:nvSpPr>
+            <p:spPr>
+              <a:xfrm>
+                <a:off x="3865265" y="4790821"/>
+                <a:ext cx="3165232" cy="377301"/>
+              </a:xfrm>
+              <a:prstGeom prst="rect">
+                <a:avLst/>
+              </a:prstGeom>
+              <a:blipFill>
+                <a:blip r:embed="rId8"/>
+                <a:stretch>
+                  <a:fillRect/>
+                </a:stretch>
+              </a:blipFill>
+              <a:ln>
+                <a:solidFill>
+                  <a:schemeClr val="accent1">
+                    <a:lumMod val="50000"/>
+                  </a:schemeClr>
+                </a:solidFill>
+              </a:ln>
+            </p:spPr>
+            <p:txBody>
+              <a:bodyPr/>
+              <a:lstStyle/>
+              <a:p>
+                <a:r>
+                  <a:rPr lang="en-US">
+                    <a:noFill/>
+                  </a:rPr>
+                  <a:t> </a:t>
+                </a:r>
+              </a:p>
+            </p:txBody>
+          </p:sp>
+        </mc:Fallback>
+      </mc:AlternateContent>
+      <p:sp>
+        <p:nvSpPr>
+          <p:cNvPr id="20" name="Rectangle 19">
+            <a:extLst>
+              <a:ext uri="{FF2B5EF4-FFF2-40B4-BE49-F238E27FC236}">
+                <a16:creationId xmlns:a16="http://schemas.microsoft.com/office/drawing/2014/main" id="{04EF41B1-7A04-2EE7-4DA8-88D2858F5019}"/>
+              </a:ext>
+            </a:extLst>
+          </p:cNvPr>
+          <p:cNvSpPr/>
+          <p:nvPr/>
+        </p:nvSpPr>
+        <p:spPr>
+          <a:xfrm>
+            <a:off x="7333933" y="2238513"/>
+            <a:ext cx="2070870" cy="301451"/>
+          </a:xfrm>
+          <a:prstGeom prst="rect">
+            <a:avLst/>
+          </a:prstGeom>
+          <a:ln>
+            <a:solidFill>
+              <a:schemeClr val="accent1">
+                <a:lumMod val="50000"/>
+              </a:schemeClr>
+            </a:solidFill>
+          </a:ln>
+        </p:spPr>
+        <p:style>
+          <a:lnRef idx="2">
+            <a:schemeClr val="accent6"/>
+          </a:lnRef>
+          <a:fillRef idx="1">
+            <a:schemeClr val="lt1"/>
+          </a:fillRef>
+          <a:effectRef idx="0">
+            <a:schemeClr val="accent6"/>
+          </a:effectRef>
+          <a:fontRef idx="minor">
+            <a:schemeClr val="dk1"/>
+          </a:fontRef>
+        </p:style>
+        <p:txBody>
+          <a:bodyPr rtlCol="0" anchor="ctr"/>
+          <a:lstStyle/>
+          <a:p>
+            <a:pPr algn="ctr"/>
+            <a:endParaRPr lang="en-US"/>
+          </a:p>
+        </p:txBody>
+      </p:sp>
+      <p:sp>
+        <p:nvSpPr>
+          <p:cNvPr id="21" name="Rectangle 20">
+            <a:extLst>
+              <a:ext uri="{FF2B5EF4-FFF2-40B4-BE49-F238E27FC236}">
+                <a16:creationId xmlns:a16="http://schemas.microsoft.com/office/drawing/2014/main" id="{1B55222A-5D86-4C4F-769B-AB3C29978C46}"/>
+              </a:ext>
+            </a:extLst>
+          </p:cNvPr>
+          <p:cNvSpPr/>
+          <p:nvPr/>
+        </p:nvSpPr>
+        <p:spPr>
+          <a:xfrm>
+            <a:off x="7267470" y="3469137"/>
+            <a:ext cx="2180495" cy="300936"/>
+          </a:xfrm>
+          <a:prstGeom prst="rect">
+            <a:avLst/>
+          </a:prstGeom>
+          <a:ln>
+            <a:solidFill>
+              <a:schemeClr val="accent1">
+                <a:lumMod val="50000"/>
+              </a:schemeClr>
+            </a:solidFill>
+          </a:ln>
+        </p:spPr>
+        <p:style>
+          <a:lnRef idx="2">
+            <a:schemeClr val="accent6"/>
+          </a:lnRef>
+          <a:fillRef idx="1">
+            <a:schemeClr val="lt1"/>
+          </a:fillRef>
+          <a:effectRef idx="0">
+            <a:schemeClr val="accent6"/>
+          </a:effectRef>
+          <a:fontRef idx="minor">
+            <a:schemeClr val="dk1"/>
+          </a:fontRef>
+        </p:style>
+        <p:txBody>
+          <a:bodyPr rtlCol="0" anchor="ctr"/>
+          <a:lstStyle/>
+          <a:p>
+            <a:pPr algn="ctr"/>
+            <a:endParaRPr lang="en-US"/>
+          </a:p>
+        </p:txBody>
+      </p:sp>
+      <p:sp>
+        <p:nvSpPr>
+          <p:cNvPr id="22" name="Rectangle 21">
+            <a:extLst>
+              <a:ext uri="{FF2B5EF4-FFF2-40B4-BE49-F238E27FC236}">
+                <a16:creationId xmlns:a16="http://schemas.microsoft.com/office/drawing/2014/main" id="{7A8026E9-2922-4268-11ED-0A19EC002164}"/>
+              </a:ext>
+            </a:extLst>
+          </p:cNvPr>
+          <p:cNvSpPr/>
+          <p:nvPr/>
+        </p:nvSpPr>
+        <p:spPr>
+          <a:xfrm>
+            <a:off x="8631534" y="5678448"/>
+            <a:ext cx="657330" cy="251209"/>
+          </a:xfrm>
+          <a:prstGeom prst="rect">
+            <a:avLst/>
+          </a:prstGeom>
+          <a:ln>
+            <a:solidFill>
+              <a:schemeClr val="accent1">
+                <a:lumMod val="50000"/>
+              </a:schemeClr>
+            </a:solidFill>
+          </a:ln>
+        </p:spPr>
+        <p:style>
+          <a:lnRef idx="2">
+            <a:schemeClr val="accent6"/>
+          </a:lnRef>
+          <a:fillRef idx="1">
+            <a:schemeClr val="lt1"/>
+          </a:fillRef>
+          <a:effectRef idx="0">
+            <a:schemeClr val="accent6"/>
+          </a:effectRef>
+          <a:fontRef idx="minor">
+            <a:schemeClr val="dk1"/>
+          </a:fontRef>
+        </p:style>
+        <p:txBody>
+          <a:bodyPr rtlCol="0" anchor="ctr"/>
+          <a:lstStyle/>
+          <a:p>
+            <a:pPr algn="ctr"/>
+            <a:endParaRPr lang="en-US"/>
+          </a:p>
+        </p:txBody>
+      </p:sp>
+      <mc:AlternateContent xmlns:mc="http://schemas.openxmlformats.org/markup-compatibility/2006">
+        <mc:Choice xmlns:a14="http://schemas.microsoft.com/office/drawing/2010/main" Requires="a14">
+          <p:sp>
+            <p:nvSpPr>
+              <p:cNvPr id="19" name="TextBox 18">
+                <a:extLst>
+                  <a:ext uri="{FF2B5EF4-FFF2-40B4-BE49-F238E27FC236}">
+                    <a16:creationId xmlns:a16="http://schemas.microsoft.com/office/drawing/2014/main" id="{5489B2DE-BB6F-809B-F413-7CE643EEF40B}"/>
+                  </a:ext>
+                </a:extLst>
+              </p:cNvPr>
+              <p:cNvSpPr txBox="1"/>
+              <p:nvPr/>
+            </p:nvSpPr>
+            <p:spPr>
+              <a:xfrm>
+                <a:off x="7199648" y="957338"/>
+                <a:ext cx="2316141" cy="5324535"/>
+              </a:xfrm>
+              <a:prstGeom prst="rect">
+                <a:avLst/>
+              </a:prstGeom>
+              <a:noFill/>
+            </p:spPr>
+            <p:txBody>
+              <a:bodyPr wrap="square" rtlCol="0">
+                <a:spAutoFit/>
+              </a:bodyPr>
+              <a:lstStyle/>
+              <a:p>
+                <a:r>
+                  <a:rPr lang="en-US" b="1" dirty="0"/>
+                  <a:t>5️⃣ </a:t>
+                </a:r>
+                <a:r>
+                  <a:rPr lang="en-US" sz="1600" b="1" dirty="0"/>
+                  <a:t>Deadlock Resolution Strategy</a:t>
+                </a:r>
+              </a:p>
+              <a:p>
+                <a:endParaRPr lang="en-US" sz="1600" b="1" dirty="0"/>
+              </a:p>
+              <a:p>
+                <a:r>
+                  <a:rPr lang="en-US" sz="1600" u="sng" dirty="0">
+                    <a:solidFill>
+                      <a:schemeClr val="accent1">
+                        <a:lumMod val="75000"/>
+                      </a:schemeClr>
+                    </a:solidFill>
+                  </a:rPr>
+                  <a:t>Priority Rule</a:t>
+                </a:r>
+              </a:p>
+              <a:p>
+                <a:r>
+                  <a:rPr lang="en-US" sz="1600" dirty="0"/>
+                  <a:t>Emergency vehicles first:</a:t>
+                </a:r>
+              </a:p>
+              <a:p>
+                <a14:m>
+                  <m:oMathPara xmlns:m="http://schemas.openxmlformats.org/officeDocument/2006/math">
+                    <m:oMathParaPr>
+                      <m:jc m:val="centerGroup"/>
+                    </m:oMathParaPr>
+                    <m:oMath xmlns:m="http://schemas.openxmlformats.org/officeDocument/2006/math">
+                      <m:sSub>
+                        <m:sSubPr>
+                          <m:ctrlPr>
+                            <a:rPr lang="ar-AE" sz="1600" smtClean="0"/>
+                          </m:ctrlPr>
+                        </m:sSubPr>
+                        <m:e>
+                          <m:r>
+                            <a:rPr lang="ar-AE" sz="1600" i="1"/>
+                            <m:t>𝐸</m:t>
+                          </m:r>
+                        </m:e>
+                        <m:sub>
+                          <m:r>
+                            <a:rPr lang="ar-AE" sz="1600" i="1"/>
+                            <m:t>𝑖</m:t>
+                          </m:r>
+                        </m:sub>
+                      </m:sSub>
+                      <m:r>
+                        <a:rPr lang="ar-AE" sz="1600"/>
+                        <m:t>=</m:t>
+                      </m:r>
+                      <m:r>
+                        <a:rPr lang="ar-AE" sz="1600"/>
+                        <m:t>1</m:t>
+                      </m:r>
+                      <m:r>
+                        <a:rPr lang="ar-AE" sz="1600"/>
+                        <m:t>⇒</m:t>
+                      </m:r>
+                      <m:r>
+                        <a:rPr lang="ar-AE" sz="1600" i="1"/>
+                        <m:t>𝑃𝑟𝑖𝑜𝑟𝑖𝑡𝑦</m:t>
+                      </m:r>
+                      <m:r>
+                        <a:rPr lang="ar-AE" sz="1600"/>
+                        <m:t>=</m:t>
+                      </m:r>
+                      <m:r>
+                        <a:rPr lang="ar-AE" sz="1600" i="1"/>
+                        <m:t>𝑖</m:t>
+                      </m:r>
+                    </m:oMath>
+                  </m:oMathPara>
+                </a14:m>
+                <a:endParaRPr lang="ar-AE" sz="1600" dirty="0"/>
+              </a:p>
+              <a:p>
+                <a:endParaRPr lang="en-US" sz="1600" dirty="0"/>
+              </a:p>
+              <a:p>
+                <a:r>
+                  <a:rPr lang="en-US" sz="1600" dirty="0"/>
+                  <a:t>Otherwise select lane with maximum queue length:</a:t>
+                </a:r>
+              </a:p>
+              <a:p>
+                <a14:m>
+                  <m:oMathPara xmlns:m="http://schemas.openxmlformats.org/officeDocument/2006/math">
+                    <m:oMathParaPr>
+                      <m:jc m:val="centerGroup"/>
+                    </m:oMathParaPr>
+                    <m:oMath xmlns:m="http://schemas.openxmlformats.org/officeDocument/2006/math">
+                      <m:r>
+                        <a:rPr lang="en-US" sz="1600" i="1" smtClean="0"/>
+                        <m:t>𝑃𝑟𝑖𝑜𝑟𝑖𝑡𝑦</m:t>
+                      </m:r>
+                      <m:r>
+                        <a:rPr lang="en-US" sz="1600"/>
+                        <m:t>=</m:t>
+                      </m:r>
+                      <m:func>
+                        <m:funcPr>
+                          <m:ctrlPr>
+                            <a:rPr lang="ar-AE" sz="1600" i="1"/>
+                          </m:ctrlPr>
+                        </m:funcPr>
+                        <m:fName>
+                          <m:r>
+                            <m:rPr>
+                              <m:sty m:val="p"/>
+                            </m:rPr>
+                            <a:rPr lang="en-US" sz="1600"/>
+                            <m:t>arg</m:t>
+                          </m:r>
+                        </m:fName>
+                        <m:e>
+                          <m:r>
+                            <m:rPr>
+                              <m:sty m:val="p"/>
+                            </m:rPr>
+                            <a:rPr lang="en-US" sz="1600"/>
+                            <m:t>max</m:t>
+                          </m:r>
+                        </m:e>
+                      </m:func>
+                      <m:r>
+                        <a:rPr lang="ar-AE" sz="1600"/>
+                        <m:t>⁡</m:t>
+                      </m:r>
+                      <m:d>
+                        <m:dPr>
+                          <m:ctrlPr>
+                            <a:rPr lang="ar-AE" sz="1600" i="1"/>
+                          </m:ctrlPr>
+                        </m:dPr>
+                        <m:e>
+                          <m:sSub>
+                            <m:sSubPr>
+                              <m:ctrlPr>
+                                <a:rPr lang="ar-AE" sz="1600" i="1"/>
+                              </m:ctrlPr>
+                            </m:sSubPr>
+                            <m:e>
+                              <m:r>
+                                <a:rPr lang="ar-AE" sz="1600" i="1"/>
+                                <m:t>𝑄</m:t>
+                              </m:r>
+                            </m:e>
+                            <m:sub>
+                              <m:r>
+                                <a:rPr lang="ar-AE" sz="1600" i="1"/>
+                                <m:t>𝑖</m:t>
+                              </m:r>
+                            </m:sub>
+                          </m:sSub>
+                        </m:e>
+                      </m:d>
+                    </m:oMath>
+                  </m:oMathPara>
+                </a14:m>
+                <a:endParaRPr lang="ar-AE" sz="1600" dirty="0"/>
+              </a:p>
+              <a:p>
+                <a:endParaRPr lang="en-US" sz="1600" u="sng" dirty="0"/>
+              </a:p>
+              <a:p>
+                <a:r>
+                  <a:rPr lang="en-US" sz="1600" u="sng" dirty="0">
+                    <a:solidFill>
+                      <a:schemeClr val="accent1">
+                        <a:lumMod val="75000"/>
+                      </a:schemeClr>
+                    </a:solidFill>
+                  </a:rPr>
+                  <a:t>Clearing Strategy</a:t>
+                </a:r>
+              </a:p>
+              <a:p>
+                <a:r>
+                  <a:rPr lang="en-US" sz="1600" dirty="0"/>
+                  <a:t>Step 1: Stop new vehicles entering intersection</a:t>
+                </a:r>
+              </a:p>
+              <a:p>
+                <a14:m>
+                  <m:oMathPara xmlns:m="http://schemas.openxmlformats.org/officeDocument/2006/math">
+                    <m:oMathParaPr>
+                      <m:jc m:val="centerGroup"/>
+                    </m:oMathParaPr>
+                    <m:oMath xmlns:m="http://schemas.openxmlformats.org/officeDocument/2006/math">
+                      <m:r>
+                        <a:rPr lang="en-US" sz="1600" i="1"/>
+                        <m:t>𝐸𝑛𝑡𝑟</m:t>
+                      </m:r>
+                      <m:sSub>
+                        <m:sSubPr>
+                          <m:ctrlPr>
+                            <a:rPr lang="ar-AE" sz="1600" i="1"/>
+                          </m:ctrlPr>
+                        </m:sSubPr>
+                        <m:e>
+                          <m:r>
+                            <a:rPr lang="ar-AE" sz="1600" i="1"/>
+                            <m:t>𝑦</m:t>
+                          </m:r>
+                        </m:e>
+                        <m:sub>
+                          <m:r>
+                            <a:rPr lang="ar-AE" sz="1600" i="1"/>
+                            <m:t>𝑖</m:t>
+                          </m:r>
+                        </m:sub>
+                      </m:sSub>
+                      <m:r>
+                        <a:rPr lang="ar-AE" sz="1600"/>
+                        <m:t>=</m:t>
+                      </m:r>
+                      <m:r>
+                        <a:rPr lang="ar-AE" sz="1600"/>
+                        <m:t>0</m:t>
+                      </m:r>
+                    </m:oMath>
+                  </m:oMathPara>
+                </a14:m>
+                <a:endParaRPr lang="ar-AE" sz="1600" dirty="0"/>
+              </a:p>
+              <a:p>
+                <a:r>
+                  <a:rPr lang="en-US" sz="1600" dirty="0"/>
+                  <a:t>Step 2: Allow highest priority lane to move.</a:t>
+                </a:r>
+              </a:p>
+              <a:p>
+                <a:r>
+                  <a:rPr lang="en-US" sz="1600" dirty="0"/>
+                  <a:t>Step 3: Resume adaptive scheduling once </a:t>
+                </a:r>
+                <a14:m>
+                  <m:oMath xmlns:m="http://schemas.openxmlformats.org/officeDocument/2006/math">
+                    <m:r>
+                      <a:rPr lang="en-US" sz="1600" i="1"/>
+                      <m:t>𝐵</m:t>
+                    </m:r>
+                    <m:r>
+                      <a:rPr lang="en-US" sz="1600"/>
+                      <m:t>→</m:t>
+                    </m:r>
+                    <m:r>
+                      <a:rPr lang="en-US" sz="1600"/>
+                      <m:t>0</m:t>
+                    </m:r>
+                  </m:oMath>
+                </a14:m>
+                <a:endParaRPr lang="en-US" sz="1600" dirty="0"/>
+              </a:p>
+              <a:p>
+                <a:endParaRPr lang="en-US" dirty="0"/>
+              </a:p>
+            </p:txBody>
+          </p:sp>
+        </mc:Choice>
+        <mc:Fallback>
+          <p:sp>
+            <p:nvSpPr>
+              <p:cNvPr id="19" name="TextBox 18">
+                <a:extLst>
+                  <a:ext uri="{FF2B5EF4-FFF2-40B4-BE49-F238E27FC236}">
+                    <a16:creationId xmlns:a16="http://schemas.microsoft.com/office/drawing/2014/main" id="{5489B2DE-BB6F-809B-F413-7CE643EEF40B}"/>
+                  </a:ext>
+                </a:extLst>
+              </p:cNvPr>
+              <p:cNvSpPr txBox="1">
+                <a:spLocks noRot="1" noChangeAspect="1" noMove="1" noResize="1" noEditPoints="1" noAdjustHandles="1" noChangeArrowheads="1" noChangeShapeType="1" noTextEdit="1"/>
+              </p:cNvSpPr>
+              <p:nvPr/>
+            </p:nvSpPr>
+            <p:spPr>
+              <a:xfrm>
+                <a:off x="7199648" y="957338"/>
+                <a:ext cx="2316141" cy="5324535"/>
+              </a:xfrm>
+              <a:prstGeom prst="rect">
+                <a:avLst/>
+              </a:prstGeom>
+              <a:blipFill>
+                <a:blip r:embed="rId9"/>
+                <a:stretch>
+                  <a:fillRect l="-2105" t="-687" r="-2105"/>
+                </a:stretch>
+              </a:blipFill>
+            </p:spPr>
+            <p:txBody>
+              <a:bodyPr/>
+              <a:lstStyle/>
+              <a:p>
+                <a:r>
+                  <a:rPr lang="en-US">
+                    <a:noFill/>
+                  </a:rPr>
+                  <a:t> </a:t>
+                </a:r>
+              </a:p>
+            </p:txBody>
+          </p:sp>
+        </mc:Fallback>
+      </mc:AlternateContent>
+      <p:sp>
+        <p:nvSpPr>
+          <p:cNvPr id="25" name="TextBox 24">
+            <a:extLst>
+              <a:ext uri="{FF2B5EF4-FFF2-40B4-BE49-F238E27FC236}">
+                <a16:creationId xmlns:a16="http://schemas.microsoft.com/office/drawing/2014/main" id="{8CF30043-4326-B6D1-DCFE-92DD76920A9C}"/>
+              </a:ext>
+            </a:extLst>
+          </p:cNvPr>
+          <p:cNvSpPr txBox="1"/>
+          <p:nvPr/>
+        </p:nvSpPr>
+        <p:spPr>
+          <a:xfrm>
+            <a:off x="9650074" y="974874"/>
+            <a:ext cx="2417661" cy="5078313"/>
+          </a:xfrm>
+          <a:prstGeom prst="rect">
+            <a:avLst/>
+          </a:prstGeom>
+          <a:noFill/>
+          <a:ln>
+            <a:solidFill>
+              <a:schemeClr val="accent1">
+                <a:lumMod val="50000"/>
+              </a:schemeClr>
+            </a:solidFill>
+          </a:ln>
+        </p:spPr>
+        <p:txBody>
+          <a:bodyPr wrap="square" rtlCol="0">
+            <a:spAutoFit/>
+          </a:bodyPr>
+          <a:lstStyle/>
+          <a:p>
+            <a:r>
+              <a:rPr lang="en-US" sz="2000" b="1" dirty="0"/>
+              <a:t>Visual Workflow :</a:t>
+            </a:r>
+            <a:r>
+              <a:rPr lang="en-US" sz="1600" dirty="0"/>
+              <a:t> </a:t>
+            </a:r>
+          </a:p>
+          <a:p>
+            <a:endParaRPr lang="en-US" sz="1600" dirty="0"/>
+          </a:p>
+          <a:p>
+            <a:r>
+              <a:rPr lang="en-US" sz="1600" dirty="0"/>
+              <a:t>Traffic Cameras</a:t>
+            </a:r>
+          </a:p>
+          <a:p>
+            <a:r>
+              <a:rPr lang="en-US" sz="1600" dirty="0"/>
+              <a:t>      ↓</a:t>
+            </a:r>
+          </a:p>
+          <a:p>
+            <a:r>
+              <a:rPr lang="en-US" sz="1600" dirty="0"/>
+              <a:t>Vehicle Detection (YOLO)</a:t>
+            </a:r>
+          </a:p>
+          <a:p>
+            <a:r>
+              <a:rPr lang="en-US" sz="1600" dirty="0"/>
+              <a:t>      ↓</a:t>
+            </a:r>
+          </a:p>
+          <a:p>
+            <a:r>
+              <a:rPr lang="en-US" sz="1600" dirty="0"/>
+              <a:t>Lane Mapping &amp; Vehicle Count</a:t>
+            </a:r>
+          </a:p>
+          <a:p>
+            <a:r>
+              <a:rPr lang="en-US" sz="1600" dirty="0"/>
+              <a:t>      ↓</a:t>
+            </a:r>
+          </a:p>
+          <a:p>
+            <a:r>
+              <a:rPr lang="en-US" sz="1600" dirty="0"/>
+              <a:t>Traffic Density Calculation</a:t>
+            </a:r>
+          </a:p>
+          <a:p>
+            <a:r>
+              <a:rPr lang="en-US" sz="1600" dirty="0"/>
+              <a:t>(Dᵢ = Nᵢ / Lᵢ)</a:t>
+            </a:r>
+          </a:p>
+          <a:p>
+            <a:r>
+              <a:rPr lang="en-US" sz="1600" dirty="0"/>
+              <a:t>      ↓</a:t>
+            </a:r>
+          </a:p>
+          <a:p>
+            <a:r>
+              <a:rPr lang="en-US" sz="1600" dirty="0"/>
+              <a:t>Priority Calculation</a:t>
+            </a:r>
+          </a:p>
+          <a:p>
+            <a:r>
+              <a:rPr lang="en-US" sz="1600" dirty="0"/>
+              <a:t>(Pᵢ = </a:t>
+            </a:r>
+            <a:r>
+              <a:rPr lang="el-GR" sz="1600" dirty="0"/>
+              <a:t>α</a:t>
+            </a:r>
+            <a:r>
+              <a:rPr lang="en-US" sz="1600" dirty="0"/>
+              <a:t>Dᵢ + </a:t>
+            </a:r>
+            <a:r>
+              <a:rPr lang="el-GR" sz="1600" dirty="0"/>
+              <a:t>β</a:t>
+            </a:r>
+            <a:r>
+              <a:rPr lang="en-US" sz="1600" dirty="0"/>
+              <a:t>Qᵢ + </a:t>
+            </a:r>
+            <a:r>
+              <a:rPr lang="el-GR" sz="1600" dirty="0"/>
+              <a:t>γ</a:t>
+            </a:r>
+            <a:r>
+              <a:rPr lang="en-US" sz="1600" dirty="0"/>
+              <a:t>Eᵢ)</a:t>
+            </a:r>
+          </a:p>
+          <a:p>
+            <a:r>
+              <a:rPr lang="en-US" sz="1600" dirty="0"/>
+              <a:t>      ↓</a:t>
+            </a:r>
+          </a:p>
+          <a:p>
+            <a:r>
+              <a:rPr lang="en-US" sz="1600" dirty="0"/>
+              <a:t>Deadlock Detection</a:t>
+            </a:r>
+          </a:p>
+          <a:p>
+            <a:r>
+              <a:rPr lang="en-US" sz="1600" dirty="0"/>
+              <a:t>      ↓</a:t>
+            </a:r>
+          </a:p>
+          <a:p>
+            <a:r>
+              <a:rPr lang="en-US" sz="1600" dirty="0"/>
+              <a:t>Signal Decision Engine</a:t>
+            </a:r>
+          </a:p>
+          <a:p>
+            <a:r>
+              <a:rPr lang="en-US" sz="1600" dirty="0"/>
+              <a:t>      ↓</a:t>
+            </a:r>
+          </a:p>
+          <a:p>
+            <a:r>
+              <a:rPr lang="en-US" sz="1600" dirty="0"/>
+              <a:t>Traffic Signal Control</a:t>
+            </a:r>
+          </a:p>
+        </p:txBody>
+      </p:sp>
     </p:spTree>
     <p:extLst>
       <p:ext uri="{BB962C8B-B14F-4D97-AF65-F5344CB8AC3E}">
@@ -5024,6 +7498,42 @@
           <a:chExt cx="0" cy="0"/>
         </a:xfrm>
       </p:grpSpPr>
+      <p:pic>
+        <p:nvPicPr>
+          <p:cNvPr id="15" name="Picture 14">
+            <a:extLst>
+              <a:ext uri="{FF2B5EF4-FFF2-40B4-BE49-F238E27FC236}">
+                <a16:creationId xmlns:a16="http://schemas.microsoft.com/office/drawing/2014/main" id="{3EE77B3F-AF84-7988-1431-5D9D2AA91456}"/>
+              </a:ext>
+            </a:extLst>
+          </p:cNvPr>
+          <p:cNvPicPr>
+            <a:picLocks noChangeAspect="1"/>
+          </p:cNvPicPr>
+          <p:nvPr/>
+        </p:nvPicPr>
+        <p:blipFill>
+          <a:blip r:embed="rId3">
+            <a:extLst>
+              <a:ext uri="{28A0092B-C50C-407E-A947-70E740481C1C}">
+                <a14:useLocalDpi xmlns:a14="http://schemas.microsoft.com/office/drawing/2010/main" val="0"/>
+              </a:ext>
+            </a:extLst>
+          </a:blip>
+          <a:stretch>
+            <a:fillRect/>
+          </a:stretch>
+        </p:blipFill>
+        <p:spPr>
+          <a:xfrm>
+            <a:off x="1" y="705678"/>
+            <a:ext cx="5774634" cy="5758007"/>
+          </a:xfrm>
+          <a:prstGeom prst="rect">
+            <a:avLst/>
+          </a:prstGeom>
+        </p:spPr>
+      </p:pic>
       <p:grpSp>
         <p:nvGrpSpPr>
           <p:cNvPr id="6" name="Group 5">
@@ -5119,7 +7629,7 @@
             <p:nvPr/>
           </p:nvPicPr>
           <p:blipFill>
-            <a:blip r:embed="rId3">
+            <a:blip r:embed="rId4">
               <a:extLst>
                 <a:ext uri="{28A0092B-C50C-407E-A947-70E740481C1C}">
                   <a14:useLocalDpi xmlns:a14="http://schemas.microsoft.com/office/drawing/2010/main" val="0"/>
@@ -5166,183 +7676,12 @@
         </p:spPr>
         <p:txBody>
           <a:bodyPr>
-            <a:normAutofit fontScale="70000" lnSpcReduction="20000"/>
+            <a:normAutofit/>
           </a:bodyPr>
           <a:lstStyle/>
           <a:p>
-            <a:r>
-              <a:rPr lang="en-IN" b="1" dirty="0">
-                <a:latin typeface="Calibri (Body)"/>
-              </a:rPr>
-              <a:t>Details of proposed work/solutions:</a:t>
-            </a:r>
-          </a:p>
-          <a:p>
-            <a:pPr marL="0" indent="0">
-              <a:buNone/>
-            </a:pPr>
-            <a:r>
-              <a:rPr lang="en-US" sz="2000" dirty="0"/>
-              <a:t>The proposed system integrates </a:t>
-            </a:r>
-            <a:r>
-              <a:rPr lang="en-US" sz="2000" b="1" dirty="0"/>
-              <a:t>Artificial Intelligence and Computer Vision </a:t>
-            </a:r>
-            <a:r>
-              <a:rPr lang="en-US" sz="2000" dirty="0"/>
-              <a:t>to create an intelligent traffic management framework.</a:t>
-            </a:r>
-          </a:p>
-          <a:p>
-            <a:pPr marL="0" indent="0">
-              <a:buNone/>
-            </a:pPr>
-            <a:r>
-              <a:rPr lang="en-US" sz="2000" dirty="0"/>
-              <a:t>Key components of the system include:</a:t>
-            </a:r>
-          </a:p>
-          <a:p>
-            <a:pPr>
-              <a:buFont typeface="Wingdings" panose="05000000000000000000" pitchFamily="2" charset="2"/>
-              <a:buChar char="§"/>
-            </a:pPr>
-            <a:r>
-              <a:rPr lang="en-US" sz="2000" dirty="0"/>
-              <a:t>Vehicle Detection using YOLO</a:t>
-            </a:r>
-          </a:p>
-          <a:p>
-            <a:pPr>
-              <a:buFont typeface="Wingdings" panose="05000000000000000000" pitchFamily="2" charset="2"/>
-              <a:buChar char="§"/>
-            </a:pPr>
-            <a:r>
-              <a:rPr lang="en-US" sz="2000" dirty="0"/>
-              <a:t>Traffic Density Estimation</a:t>
-            </a:r>
-          </a:p>
-          <a:p>
-            <a:pPr>
-              <a:buFont typeface="Wingdings" panose="05000000000000000000" pitchFamily="2" charset="2"/>
-              <a:buChar char="§"/>
-            </a:pPr>
-            <a:r>
-              <a:rPr lang="en-US" sz="2000" dirty="0"/>
-              <a:t>Deadlock Detection</a:t>
-            </a:r>
-          </a:p>
-          <a:p>
-            <a:pPr>
-              <a:buFont typeface="Wingdings" panose="05000000000000000000" pitchFamily="2" charset="2"/>
-              <a:buChar char="§"/>
-            </a:pPr>
-            <a:r>
-              <a:rPr lang="en-US" sz="2000" dirty="0"/>
-              <a:t>Deadlock Recovery Mechanism</a:t>
-            </a:r>
-          </a:p>
-          <a:p>
-            <a:pPr>
-              <a:buFont typeface="Wingdings" panose="05000000000000000000" pitchFamily="2" charset="2"/>
-              <a:buChar char="§"/>
-            </a:pPr>
-            <a:r>
-              <a:rPr lang="en-US" sz="2000" dirty="0"/>
-              <a:t>Adaptive Traffic Signal Scheduling</a:t>
-            </a:r>
-          </a:p>
-          <a:p>
-            <a:pPr>
-              <a:buFont typeface="Wingdings" panose="05000000000000000000" pitchFamily="2" charset="2"/>
-              <a:buChar char="§"/>
-            </a:pPr>
-            <a:r>
-              <a:rPr lang="en-US" sz="2000" dirty="0"/>
-              <a:t>Emergency Vehicle Prioritization</a:t>
-            </a:r>
-            <a:endParaRPr lang="en-IN" sz="2000" b="1" dirty="0"/>
-          </a:p>
-          <a:p>
-            <a:r>
-              <a:rPr lang="en-IN" b="1" dirty="0"/>
-              <a:t>Result achieved (if any):</a:t>
-            </a:r>
-          </a:p>
-          <a:p>
-            <a:pPr lvl="1">
-              <a:buFont typeface="Wingdings" panose="05000000000000000000" pitchFamily="2" charset="2"/>
-              <a:buChar char="§"/>
-            </a:pPr>
-            <a:r>
-              <a:rPr lang="en-US" dirty="0"/>
-              <a:t>The project architecture and modular implementation have been successfully designed, including perception, decision, communication, and visualization layers. YOLO-based detection identifies vehicles, lanes, and intersection zones.</a:t>
-            </a:r>
-          </a:p>
-          <a:p>
             <a:pPr marL="457200" lvl="1" indent="0">
               <a:buNone/>
-            </a:pPr>
-            <a:endParaRPr lang="en-IN" dirty="0">
-              <a:latin typeface="Calibri (Body)"/>
-            </a:endParaRPr>
-          </a:p>
-          <a:p>
-            <a:pPr lvl="1">
-              <a:buFont typeface="Wingdings" panose="05000000000000000000" pitchFamily="2" charset="2"/>
-              <a:buChar char="§"/>
-            </a:pPr>
-            <a:r>
-              <a:rPr lang="en-US" dirty="0"/>
-              <a:t>A working prototype has been implemented where traffic videos are processed using YOLO to detect vehicles and estimate traffic density.</a:t>
-            </a:r>
-          </a:p>
-          <a:p>
-            <a:pPr lvl="1">
-              <a:buFont typeface="Wingdings" panose="05000000000000000000" pitchFamily="2" charset="2"/>
-              <a:buChar char="§"/>
-            </a:pPr>
-            <a:endParaRPr lang="en-US" dirty="0"/>
-          </a:p>
-          <a:p>
-            <a:pPr lvl="1">
-              <a:buFont typeface="Wingdings" panose="05000000000000000000" pitchFamily="2" charset="2"/>
-              <a:buChar char="§"/>
-            </a:pPr>
-            <a:r>
-              <a:rPr lang="en-US" dirty="0"/>
-              <a:t>The system integrates deadlock detection logic and adaptive traffic signal scheduling with a real-time </a:t>
-            </a:r>
-            <a:r>
-              <a:rPr lang="en-US" dirty="0" err="1"/>
-              <a:t>Streamlit</a:t>
-            </a:r>
-            <a:r>
-              <a:rPr lang="en-US" dirty="0"/>
-              <a:t> dashboard for visualization.</a:t>
-            </a:r>
-          </a:p>
-          <a:p>
-            <a:r>
-              <a:rPr lang="en-US" b="1" dirty="0"/>
-              <a:t>References:</a:t>
-            </a:r>
-          </a:p>
-          <a:p>
-            <a:pPr lvl="1">
-              <a:buFont typeface="Wingdings" panose="05000000000000000000" pitchFamily="2" charset="2"/>
-              <a:buChar char="§"/>
-            </a:pPr>
-            <a:r>
-              <a:rPr lang="en-US" b="1" dirty="0"/>
-              <a:t>    https://ijrti.org/papers/IJRTI2305036.pdf</a:t>
-            </a:r>
-          </a:p>
-          <a:p>
-            <a:pPr lvl="1">
-              <a:buFont typeface="Wingdings" panose="05000000000000000000" pitchFamily="2" charset="2"/>
-              <a:buChar char="§"/>
             </a:pPr>
             <a:endParaRPr lang="en-US" dirty="0"/>
           </a:p>
@@ -5629,78 +7968,296 @@
           </p:txBody>
         </p:sp>
       </p:grpSp>
-      <p:pic>
-        <p:nvPicPr>
-          <p:cNvPr id="10" name="Picture 9">
-            <a:extLst>
-              <a:ext uri="{FF2B5EF4-FFF2-40B4-BE49-F238E27FC236}">
-                <a16:creationId xmlns:a16="http://schemas.microsoft.com/office/drawing/2014/main" id="{92BDC4E0-EB7C-043A-1FD4-224AED6691B1}"/>
-              </a:ext>
-            </a:extLst>
-          </p:cNvPr>
-          <p:cNvPicPr>
-            <a:picLocks noChangeAspect="1"/>
-          </p:cNvPicPr>
+      <p:sp>
+        <p:nvSpPr>
+          <p:cNvPr id="16" name="TextBox 15">
+            <a:extLst>
+              <a:ext uri="{FF2B5EF4-FFF2-40B4-BE49-F238E27FC236}">
+                <a16:creationId xmlns:a16="http://schemas.microsoft.com/office/drawing/2014/main" id="{0E2271FC-DED2-F4A4-7142-E67D523FFCC1}"/>
+              </a:ext>
+            </a:extLst>
+          </p:cNvPr>
+          <p:cNvSpPr txBox="1"/>
           <p:nvPr/>
-        </p:nvPicPr>
-        <p:blipFill>
-          <a:blip r:embed="rId4">
-            <a:extLst>
-              <a:ext uri="{28A0092B-C50C-407E-A947-70E740481C1C}">
-                <a14:useLocalDpi xmlns:a14="http://schemas.microsoft.com/office/drawing/2010/main" val="0"/>
-              </a:ext>
-            </a:extLst>
-          </a:blip>
-          <a:stretch>
-            <a:fillRect/>
-          </a:stretch>
-        </p:blipFill>
+        </p:nvSpPr>
         <p:spPr>
           <a:xfrm>
-            <a:off x="3612731" y="1778558"/>
-            <a:ext cx="3080711" cy="1712480"/>
+            <a:off x="5774635" y="1616859"/>
+            <a:ext cx="2434645" cy="954107"/>
           </a:xfrm>
           <a:prstGeom prst="rect">
             <a:avLst/>
           </a:prstGeom>
+          <a:noFill/>
         </p:spPr>
-      </p:pic>
-      <p:pic>
-        <p:nvPicPr>
-          <p:cNvPr id="13" name="Picture 12">
-            <a:extLst>
-              <a:ext uri="{FF2B5EF4-FFF2-40B4-BE49-F238E27FC236}">
-                <a16:creationId xmlns:a16="http://schemas.microsoft.com/office/drawing/2014/main" id="{2257D95E-D15D-C4E2-92FE-E0B672EDC536}"/>
-              </a:ext>
-            </a:extLst>
-          </p:cNvPr>
-          <p:cNvPicPr>
-            <a:picLocks noChangeAspect="1"/>
-          </p:cNvPicPr>
+        <p:txBody>
+          <a:bodyPr wrap="square" rtlCol="0">
+            <a:spAutoFit/>
+          </a:bodyPr>
+          <a:lstStyle/>
+          <a:p>
+            <a:r>
+              <a:rPr lang="en-US" sz="1400" b="1" dirty="0"/>
+              <a:t>1️⃣ Vehicle Detection Result</a:t>
+            </a:r>
+            <a:endParaRPr lang="en-US" sz="1400" dirty="0"/>
+          </a:p>
+          <a:p>
+            <a:r>
+              <a:rPr lang="en-US" sz="1400" dirty="0"/>
+              <a:t>YOLO bounding boxes</a:t>
+            </a:r>
+          </a:p>
+          <a:p>
+            <a:r>
+              <a:rPr lang="en-US" sz="1400" dirty="0"/>
+              <a:t>vehicle labels (car, bike, truck)</a:t>
+            </a:r>
+            <a:br>
+              <a:rPr lang="en-US" sz="1400" dirty="0"/>
+            </a:br>
+            <a:endParaRPr lang="en-US" sz="1400" dirty="0"/>
+          </a:p>
+        </p:txBody>
+      </p:sp>
+      <p:sp>
+        <p:nvSpPr>
+          <p:cNvPr id="17" name="TextBox 16">
+            <a:extLst>
+              <a:ext uri="{FF2B5EF4-FFF2-40B4-BE49-F238E27FC236}">
+                <a16:creationId xmlns:a16="http://schemas.microsoft.com/office/drawing/2014/main" id="{49E1019E-2DE4-1B52-BFA9-3CF5061BB2BA}"/>
+              </a:ext>
+            </a:extLst>
+          </p:cNvPr>
+          <p:cNvSpPr txBox="1"/>
           <p:nvPr/>
-        </p:nvPicPr>
-        <p:blipFill>
-          <a:blip r:embed="rId5">
-            <a:extLst>
-              <a:ext uri="{28A0092B-C50C-407E-A947-70E740481C1C}">
-                <a14:useLocalDpi xmlns:a14="http://schemas.microsoft.com/office/drawing/2010/main" val="0"/>
-              </a:ext>
-            </a:extLst>
-          </a:blip>
-          <a:stretch>
-            <a:fillRect/>
-          </a:stretch>
-        </p:blipFill>
+        </p:nvSpPr>
         <p:spPr>
           <a:xfrm>
-            <a:off x="6927987" y="1698171"/>
-            <a:ext cx="1864320" cy="2019719"/>
+            <a:off x="8173720" y="1616859"/>
+            <a:ext cx="2275840" cy="1508105"/>
           </a:xfrm>
           <a:prstGeom prst="rect">
             <a:avLst/>
           </a:prstGeom>
+          <a:noFill/>
         </p:spPr>
-      </p:pic>
+        <p:txBody>
+          <a:bodyPr wrap="square" rtlCol="0">
+            <a:spAutoFit/>
+          </a:bodyPr>
+          <a:lstStyle/>
+          <a:p>
+            <a:r>
+              <a:rPr lang="en-US" sz="1400" b="1" dirty="0"/>
+              <a:t>2️⃣ Multi-Lane Traffic Monitoring</a:t>
+            </a:r>
+          </a:p>
+          <a:p>
+            <a:r>
+              <a:rPr lang="en-US" sz="1400" dirty="0"/>
+              <a:t>North / South / East / West vehicle counts</a:t>
+            </a:r>
+          </a:p>
+          <a:p>
+            <a:endParaRPr lang="en-US" dirty="0"/>
+          </a:p>
+          <a:p>
+            <a:endParaRPr lang="en-US" dirty="0"/>
+          </a:p>
+        </p:txBody>
+      </p:sp>
+      <p:sp>
+        <p:nvSpPr>
+          <p:cNvPr id="18" name="TextBox 17">
+            <a:extLst>
+              <a:ext uri="{FF2B5EF4-FFF2-40B4-BE49-F238E27FC236}">
+                <a16:creationId xmlns:a16="http://schemas.microsoft.com/office/drawing/2014/main" id="{337C895E-EEE6-B95C-C5A9-A0A946D6C971}"/>
+              </a:ext>
+            </a:extLst>
+          </p:cNvPr>
+          <p:cNvSpPr txBox="1"/>
+          <p:nvPr/>
+        </p:nvSpPr>
+        <p:spPr>
+          <a:xfrm>
+            <a:off x="10449560" y="1605972"/>
+            <a:ext cx="1706872" cy="1446550"/>
+          </a:xfrm>
+          <a:prstGeom prst="rect">
+            <a:avLst/>
+          </a:prstGeom>
+          <a:noFill/>
+        </p:spPr>
+        <p:txBody>
+          <a:bodyPr wrap="square" rtlCol="0">
+            <a:spAutoFit/>
+          </a:bodyPr>
+          <a:lstStyle/>
+          <a:p>
+            <a:r>
+              <a:rPr lang="en-US" sz="1400" b="1" dirty="0"/>
+              <a:t>3️⃣ Traffic Dashboard</a:t>
+            </a:r>
+          </a:p>
+          <a:p>
+            <a:r>
+              <a:rPr lang="en-US" sz="1400" dirty="0"/>
+              <a:t>lane vehicle counts</a:t>
+            </a:r>
+          </a:p>
+          <a:p>
+            <a:r>
+              <a:rPr lang="en-US" sz="1400" dirty="0"/>
+              <a:t>signal timers</a:t>
+            </a:r>
+          </a:p>
+          <a:p>
+            <a:r>
+              <a:rPr lang="en-US" sz="1400" dirty="0"/>
+              <a:t>deadlock alerts</a:t>
+            </a:r>
+          </a:p>
+          <a:p>
+            <a:endParaRPr lang="en-US" dirty="0"/>
+          </a:p>
+        </p:txBody>
+      </p:sp>
+      <p:sp>
+        <p:nvSpPr>
+          <p:cNvPr id="19" name="TextBox 18">
+            <a:extLst>
+              <a:ext uri="{FF2B5EF4-FFF2-40B4-BE49-F238E27FC236}">
+                <a16:creationId xmlns:a16="http://schemas.microsoft.com/office/drawing/2014/main" id="{1AED9616-E3C6-4891-88C7-519E9A2BCBEB}"/>
+              </a:ext>
+            </a:extLst>
+          </p:cNvPr>
+          <p:cNvSpPr txBox="1"/>
+          <p:nvPr/>
+        </p:nvSpPr>
+        <p:spPr>
+          <a:xfrm>
+            <a:off x="5774635" y="1219200"/>
+            <a:ext cx="6381797" cy="369332"/>
+          </a:xfrm>
+          <a:prstGeom prst="rect">
+            <a:avLst/>
+          </a:prstGeom>
+          <a:noFill/>
+        </p:spPr>
+        <p:txBody>
+          <a:bodyPr wrap="square" rtlCol="0">
+            <a:spAutoFit/>
+          </a:bodyPr>
+          <a:lstStyle/>
+          <a:p>
+            <a:r>
+              <a:rPr lang="en-US" b="1" dirty="0"/>
+              <a:t>Detection Result: </a:t>
+            </a:r>
+          </a:p>
+        </p:txBody>
+      </p:sp>
+      <p:sp>
+        <p:nvSpPr>
+          <p:cNvPr id="21" name="TextBox 20">
+            <a:extLst>
+              <a:ext uri="{FF2B5EF4-FFF2-40B4-BE49-F238E27FC236}">
+                <a16:creationId xmlns:a16="http://schemas.microsoft.com/office/drawing/2014/main" id="{36A0B3CE-C374-1C6D-2E24-1E445D08ADA2}"/>
+              </a:ext>
+            </a:extLst>
+          </p:cNvPr>
+          <p:cNvSpPr txBox="1"/>
+          <p:nvPr/>
+        </p:nvSpPr>
+        <p:spPr>
+          <a:xfrm>
+            <a:off x="5774635" y="3214211"/>
+            <a:ext cx="6381797" cy="2893100"/>
+          </a:xfrm>
+          <a:prstGeom prst="rect">
+            <a:avLst/>
+          </a:prstGeom>
+          <a:noFill/>
+        </p:spPr>
+        <p:txBody>
+          <a:bodyPr wrap="square" rtlCol="0">
+            <a:spAutoFit/>
+          </a:bodyPr>
+          <a:lstStyle/>
+          <a:p>
+            <a:r>
+              <a:rPr lang="en-US" b="1" dirty="0"/>
+              <a:t>Result Achieved: </a:t>
+            </a:r>
+          </a:p>
+          <a:p>
+            <a:endParaRPr lang="en-US" b="1" dirty="0"/>
+          </a:p>
+          <a:p>
+            <a:r>
+              <a:rPr lang="en-US" sz="1600" b="1" dirty="0">
+                <a:latin typeface="Aptos" panose="020B0004020202020204" pitchFamily="34" charset="0"/>
+              </a:rPr>
+              <a:t>Prototype Development</a:t>
+            </a:r>
+          </a:p>
+          <a:p>
+            <a:r>
+              <a:rPr lang="en-US" sz="1600" dirty="0">
+                <a:latin typeface="Aptos" panose="020B0004020202020204" pitchFamily="34" charset="0"/>
+              </a:rPr>
+              <a:t>• AI-based  traffic  monitoring system implemented using YOLO object detection</a:t>
+            </a:r>
+            <a:br>
+              <a:rPr lang="en-US" sz="1600" dirty="0">
+                <a:latin typeface="Aptos" panose="020B0004020202020204" pitchFamily="34" charset="0"/>
+              </a:rPr>
+            </a:br>
+            <a:r>
+              <a:rPr lang="en-US" sz="1600" dirty="0">
+                <a:latin typeface="Aptos" panose="020B0004020202020204" pitchFamily="34" charset="0"/>
+              </a:rPr>
+              <a:t>• Multi-lane vehicle detection and traffic density estimation </a:t>
+            </a:r>
+          </a:p>
+          <a:p>
+            <a:endParaRPr lang="en-US" sz="1600" b="1" dirty="0">
+              <a:latin typeface="Aptos" panose="020B0004020202020204" pitchFamily="34" charset="0"/>
+            </a:endParaRPr>
+          </a:p>
+          <a:p>
+            <a:r>
+              <a:rPr lang="en-US" sz="1600" b="1" dirty="0">
+                <a:latin typeface="Aptos" panose="020B0004020202020204" pitchFamily="34" charset="0"/>
+              </a:rPr>
+              <a:t>System Capabilities</a:t>
+            </a:r>
+          </a:p>
+          <a:p>
+            <a:r>
+              <a:rPr lang="en-US" sz="1600" dirty="0">
+                <a:latin typeface="Aptos" panose="020B0004020202020204" pitchFamily="34" charset="0"/>
+              </a:rPr>
+              <a:t>• Real-time vehicle detection and classification</a:t>
+            </a:r>
+            <a:br>
+              <a:rPr lang="en-US" sz="1600" dirty="0">
+                <a:latin typeface="Aptos" panose="020B0004020202020204" pitchFamily="34" charset="0"/>
+              </a:rPr>
+            </a:br>
+            <a:r>
+              <a:rPr lang="en-US" sz="1600" dirty="0">
+                <a:latin typeface="Aptos" panose="020B0004020202020204" pitchFamily="34" charset="0"/>
+              </a:rPr>
+              <a:t>• Lane density calculation and priority scoring</a:t>
+            </a:r>
+          </a:p>
+          <a:p>
+            <a:endParaRPr lang="en-US" dirty="0"/>
+          </a:p>
+        </p:txBody>
+      </p:sp>
     </p:spTree>
     <p:extLst>
       <p:ext uri="{BB962C8B-B14F-4D97-AF65-F5344CB8AC3E}">
